--- a/docs/ExpertTwin-Hackathon-Pitch.pptx
+++ b/docs/ExpertTwin-Hackathon-Pitch.pptx
@@ -16,6 +16,7 @@
     <p:sldId id="264" r:id="rId15"/>
     <p:sldId id="265" r:id="rId16"/>
     <p:sldId id="266" r:id="rId17"/>
+    <p:sldId id="267" r:id="rId18"/>
   </p:sldIdLst>
   <p:sldSz cx="12191695" cy="6858000" type="screen4x3"/>
   <p:notesSz cx="6858000" cy="9144000"/>
@@ -3586,6 +3587,939 @@
     <p:bg>
       <p:bgPr>
         <a:solidFill>
+          <a:srgbClr val="0B1F3A"/>
+        </a:solidFill>
+        <a:effectLst/>
+      </p:bgPr>
+    </p:bg>
+    <p:spTree>
+      <p:nvGrpSpPr>
+        <p:cNvPr id="1" name=""/>
+        <p:cNvGrpSpPr/>
+        <p:nvPr/>
+      </p:nvGrpSpPr>
+      <p:grpSpPr/>
+      <p:sp>
+        <p:nvSpPr>
+          <p:cNvPr id="2" name="TextBox 1"/>
+          <p:cNvSpPr txBox="1"/>
+          <p:nvPr/>
+        </p:nvSpPr>
+        <p:spPr>
+          <a:xfrm>
+            <a:off x="594360" y="292608"/>
+            <a:ext cx="10972800" cy="320040"/>
+          </a:xfrm>
+          <a:prstGeom prst="rect">
+            <a:avLst/>
+          </a:prstGeom>
+          <a:noFill/>
+        </p:spPr>
+        <p:txBody>
+          <a:bodyPr wrap="square" lIns="54864" rIns="54864" tIns="54864" bIns="54864" anchor="ctr">
+            <a:normAutofit/>
+          </a:bodyPr>
+          <a:lstStyle/>
+          <a:p>
+            <a:pPr algn="l"/>
+            <a:r>
+              <a:rPr sz="1100" b="1">
+                <a:solidFill>
+                  <a:srgbClr val="0078D4"/>
+                </a:solidFill>
+                <a:latin typeface="Aptos"/>
+              </a:rPr>
+              <a:t>HACKATHON OUTCOME</a:t>
+            </a:r>
+          </a:p>
+        </p:txBody>
+      </p:sp>
+      <p:sp>
+        <p:nvSpPr>
+          <p:cNvPr id="3" name="TextBox 2"/>
+          <p:cNvSpPr txBox="1"/>
+          <p:nvPr/>
+        </p:nvSpPr>
+        <p:spPr>
+          <a:xfrm>
+            <a:off x="594360" y="621792"/>
+            <a:ext cx="10972800" cy="658368"/>
+          </a:xfrm>
+          <a:prstGeom prst="rect">
+            <a:avLst/>
+          </a:prstGeom>
+          <a:noFill/>
+        </p:spPr>
+        <p:txBody>
+          <a:bodyPr wrap="square" lIns="54864" rIns="54864" tIns="54864" bIns="54864" anchor="ctr">
+            <a:normAutofit/>
+          </a:bodyPr>
+          <a:lstStyle/>
+          <a:p>
+            <a:pPr algn="l"/>
+            <a:r>
+              <a:rPr sz="2800" b="1">
+                <a:solidFill>
+                  <a:srgbClr val="FFFFFF"/>
+                </a:solidFill>
+                <a:latin typeface="Aptos"/>
+              </a:rPr>
+              <a:t>A working Azure-hosted Digital Employee prototype.</a:t>
+            </a:r>
+          </a:p>
+        </p:txBody>
+      </p:sp>
+      <p:sp>
+        <p:nvSpPr>
+          <p:cNvPr id="4" name="TextBox 3"/>
+          <p:cNvSpPr txBox="1"/>
+          <p:nvPr/>
+        </p:nvSpPr>
+        <p:spPr>
+          <a:xfrm>
+            <a:off x="612648" y="1252728"/>
+            <a:ext cx="10698480" cy="438912"/>
+          </a:xfrm>
+          <a:prstGeom prst="rect">
+            <a:avLst/>
+          </a:prstGeom>
+          <a:noFill/>
+        </p:spPr>
+        <p:txBody>
+          <a:bodyPr wrap="square" lIns="54864" rIns="54864" tIns="54864" bIns="54864" anchor="ctr">
+            <a:normAutofit/>
+          </a:bodyPr>
+          <a:lstStyle/>
+          <a:p>
+            <a:pPr algn="l"/>
+            <a:r>
+              <a:rPr sz="1400" b="0">
+                <a:solidFill>
+                  <a:srgbClr val="B9D8F4"/>
+                </a:solidFill>
+                <a:latin typeface="Aptos"/>
+              </a:rPr>
+              <a:t>The demonstration is live, evidence-grounded, and designed around transparent trust behavior.</a:t>
+            </a:r>
+          </a:p>
+        </p:txBody>
+      </p:sp>
+      <p:sp>
+        <p:nvSpPr>
+          <p:cNvPr id="5" name="Rounded Rectangle 4"/>
+          <p:cNvSpPr/>
+          <p:nvPr/>
+        </p:nvSpPr>
+        <p:spPr>
+          <a:xfrm>
+            <a:off x="658368" y="1965960"/>
+            <a:ext cx="2606040" cy="1508760"/>
+          </a:xfrm>
+          <a:prstGeom prst="roundRect">
+            <a:avLst/>
+          </a:prstGeom>
+          <a:solidFill>
+            <a:srgbClr val="142C4D"/>
+          </a:solidFill>
+          <a:ln w="15240">
+            <a:solidFill>
+              <a:srgbClr val="28547E"/>
+            </a:solidFill>
+          </a:ln>
+        </p:spPr>
+        <p:style>
+          <a:lnRef idx="1">
+            <a:schemeClr val="accent1"/>
+          </a:lnRef>
+          <a:fillRef idx="3">
+            <a:schemeClr val="accent1"/>
+          </a:fillRef>
+          <a:effectRef idx="2">
+            <a:schemeClr val="accent1"/>
+          </a:effectRef>
+          <a:fontRef idx="minor">
+            <a:schemeClr val="lt1"/>
+          </a:fontRef>
+        </p:style>
+        <p:txBody>
+          <a:bodyPr rtlCol="0" anchor="ctr"/>
+          <a:lstStyle/>
+          <a:p>
+            <a:pPr algn="ctr"/>
+          </a:p>
+        </p:txBody>
+      </p:sp>
+      <p:sp>
+        <p:nvSpPr>
+          <p:cNvPr id="6" name="TextBox 5"/>
+          <p:cNvSpPr txBox="1"/>
+          <p:nvPr/>
+        </p:nvSpPr>
+        <p:spPr>
+          <a:xfrm>
+            <a:off x="822959" y="2148840"/>
+            <a:ext cx="2240280" cy="566928"/>
+          </a:xfrm>
+          <a:prstGeom prst="rect">
+            <a:avLst/>
+          </a:prstGeom>
+          <a:noFill/>
+        </p:spPr>
+        <p:txBody>
+          <a:bodyPr wrap="square" lIns="54864" rIns="54864" tIns="54864" bIns="54864" anchor="ctr">
+            <a:normAutofit/>
+          </a:bodyPr>
+          <a:lstStyle/>
+          <a:p>
+            <a:pPr algn="ctr"/>
+            <a:r>
+              <a:rPr sz="3000" b="1">
+                <a:solidFill>
+                  <a:srgbClr val="65B5F6"/>
+                </a:solidFill>
+                <a:latin typeface="Aptos"/>
+              </a:rPr>
+              <a:t>11</a:t>
+            </a:r>
+          </a:p>
+        </p:txBody>
+      </p:sp>
+      <p:sp>
+        <p:nvSpPr>
+          <p:cNvPr id="7" name="TextBox 6"/>
+          <p:cNvSpPr txBox="1"/>
+          <p:nvPr/>
+        </p:nvSpPr>
+        <p:spPr>
+          <a:xfrm>
+            <a:off x="822959" y="2779776"/>
+            <a:ext cx="2240280" cy="310896"/>
+          </a:xfrm>
+          <a:prstGeom prst="rect">
+            <a:avLst/>
+          </a:prstGeom>
+          <a:noFill/>
+        </p:spPr>
+        <p:txBody>
+          <a:bodyPr wrap="square" lIns="54864" rIns="54864" tIns="54864" bIns="54864" anchor="ctr">
+            <a:normAutofit/>
+          </a:bodyPr>
+          <a:lstStyle/>
+          <a:p>
+            <a:pPr algn="ctr"/>
+            <a:r>
+              <a:rPr sz="1300" b="1">
+                <a:solidFill>
+                  <a:srgbClr val="FFFFFF"/>
+                </a:solidFill>
+                <a:latin typeface="Aptos"/>
+              </a:rPr>
+              <a:t>authorized AI Clones</a:t>
+            </a:r>
+          </a:p>
+        </p:txBody>
+      </p:sp>
+      <p:sp>
+        <p:nvSpPr>
+          <p:cNvPr id="8" name="Rounded Rectangle 7"/>
+          <p:cNvSpPr/>
+          <p:nvPr/>
+        </p:nvSpPr>
+        <p:spPr>
+          <a:xfrm>
+            <a:off x="3511296" y="1965960"/>
+            <a:ext cx="2606040" cy="1508760"/>
+          </a:xfrm>
+          <a:prstGeom prst="roundRect">
+            <a:avLst/>
+          </a:prstGeom>
+          <a:solidFill>
+            <a:srgbClr val="142C4D"/>
+          </a:solidFill>
+          <a:ln w="15240">
+            <a:solidFill>
+              <a:srgbClr val="28547E"/>
+            </a:solidFill>
+          </a:ln>
+        </p:spPr>
+        <p:style>
+          <a:lnRef idx="1">
+            <a:schemeClr val="accent1"/>
+          </a:lnRef>
+          <a:fillRef idx="3">
+            <a:schemeClr val="accent1"/>
+          </a:fillRef>
+          <a:effectRef idx="2">
+            <a:schemeClr val="accent1"/>
+          </a:effectRef>
+          <a:fontRef idx="minor">
+            <a:schemeClr val="lt1"/>
+          </a:fontRef>
+        </p:style>
+        <p:txBody>
+          <a:bodyPr rtlCol="0" anchor="ctr"/>
+          <a:lstStyle/>
+          <a:p>
+            <a:pPr algn="ctr"/>
+          </a:p>
+        </p:txBody>
+      </p:sp>
+      <p:sp>
+        <p:nvSpPr>
+          <p:cNvPr id="9" name="TextBox 8"/>
+          <p:cNvSpPr txBox="1"/>
+          <p:nvPr/>
+        </p:nvSpPr>
+        <p:spPr>
+          <a:xfrm>
+            <a:off x="3675887" y="2148840"/>
+            <a:ext cx="2240280" cy="566928"/>
+          </a:xfrm>
+          <a:prstGeom prst="rect">
+            <a:avLst/>
+          </a:prstGeom>
+          <a:noFill/>
+        </p:spPr>
+        <p:txBody>
+          <a:bodyPr wrap="square" lIns="54864" rIns="54864" tIns="54864" bIns="54864" anchor="ctr">
+            <a:normAutofit/>
+          </a:bodyPr>
+          <a:lstStyle/>
+          <a:p>
+            <a:pPr algn="ctr"/>
+            <a:r>
+              <a:rPr sz="3000" b="1">
+                <a:solidFill>
+                  <a:srgbClr val="65B5F6"/>
+                </a:solidFill>
+                <a:latin typeface="Aptos"/>
+              </a:rPr>
+              <a:t>7</a:t>
+            </a:r>
+          </a:p>
+        </p:txBody>
+      </p:sp>
+      <p:sp>
+        <p:nvSpPr>
+          <p:cNvPr id="10" name="TextBox 9"/>
+          <p:cNvSpPr txBox="1"/>
+          <p:nvPr/>
+        </p:nvSpPr>
+        <p:spPr>
+          <a:xfrm>
+            <a:off x="3675887" y="2779776"/>
+            <a:ext cx="2240280" cy="310896"/>
+          </a:xfrm>
+          <a:prstGeom prst="rect">
+            <a:avLst/>
+          </a:prstGeom>
+          <a:noFill/>
+        </p:spPr>
+        <p:txBody>
+          <a:bodyPr wrap="square" lIns="54864" rIns="54864" tIns="54864" bIns="54864" anchor="ctr">
+            <a:normAutofit/>
+          </a:bodyPr>
+          <a:lstStyle/>
+          <a:p>
+            <a:pPr algn="ctr"/>
+            <a:r>
+              <a:rPr sz="1300" b="1">
+                <a:solidFill>
+                  <a:srgbClr val="FFFFFF"/>
+                </a:solidFill>
+                <a:latin typeface="Aptos"/>
+              </a:rPr>
+              <a:t>mixed evidence formats</a:t>
+            </a:r>
+          </a:p>
+        </p:txBody>
+      </p:sp>
+      <p:sp>
+        <p:nvSpPr>
+          <p:cNvPr id="11" name="Rounded Rectangle 10"/>
+          <p:cNvSpPr/>
+          <p:nvPr/>
+        </p:nvSpPr>
+        <p:spPr>
+          <a:xfrm>
+            <a:off x="6364224" y="1965960"/>
+            <a:ext cx="2606040" cy="1508760"/>
+          </a:xfrm>
+          <a:prstGeom prst="roundRect">
+            <a:avLst/>
+          </a:prstGeom>
+          <a:solidFill>
+            <a:srgbClr val="142C4D"/>
+          </a:solidFill>
+          <a:ln w="15240">
+            <a:solidFill>
+              <a:srgbClr val="28547E"/>
+            </a:solidFill>
+          </a:ln>
+        </p:spPr>
+        <p:style>
+          <a:lnRef idx="1">
+            <a:schemeClr val="accent1"/>
+          </a:lnRef>
+          <a:fillRef idx="3">
+            <a:schemeClr val="accent1"/>
+          </a:fillRef>
+          <a:effectRef idx="2">
+            <a:schemeClr val="accent1"/>
+          </a:effectRef>
+          <a:fontRef idx="minor">
+            <a:schemeClr val="lt1"/>
+          </a:fontRef>
+        </p:style>
+        <p:txBody>
+          <a:bodyPr rtlCol="0" anchor="ctr"/>
+          <a:lstStyle/>
+          <a:p>
+            <a:pPr algn="ctr"/>
+          </a:p>
+        </p:txBody>
+      </p:sp>
+      <p:sp>
+        <p:nvSpPr>
+          <p:cNvPr id="12" name="TextBox 11"/>
+          <p:cNvSpPr txBox="1"/>
+          <p:nvPr/>
+        </p:nvSpPr>
+        <p:spPr>
+          <a:xfrm>
+            <a:off x="6528816" y="2148840"/>
+            <a:ext cx="2240280" cy="566928"/>
+          </a:xfrm>
+          <a:prstGeom prst="rect">
+            <a:avLst/>
+          </a:prstGeom>
+          <a:noFill/>
+        </p:spPr>
+        <p:txBody>
+          <a:bodyPr wrap="square" lIns="54864" rIns="54864" tIns="54864" bIns="54864" anchor="ctr">
+            <a:normAutofit/>
+          </a:bodyPr>
+          <a:lstStyle/>
+          <a:p>
+            <a:pPr algn="ctr"/>
+            <a:r>
+              <a:rPr sz="3000" b="1">
+                <a:solidFill>
+                  <a:srgbClr val="65B5F6"/>
+                </a:solidFill>
+                <a:latin typeface="Aptos"/>
+              </a:rPr>
+              <a:t>1</a:t>
+            </a:r>
+          </a:p>
+        </p:txBody>
+      </p:sp>
+      <p:sp>
+        <p:nvSpPr>
+          <p:cNvPr id="13" name="TextBox 12"/>
+          <p:cNvSpPr txBox="1"/>
+          <p:nvPr/>
+        </p:nvSpPr>
+        <p:spPr>
+          <a:xfrm>
+            <a:off x="6528816" y="2779776"/>
+            <a:ext cx="2240280" cy="310896"/>
+          </a:xfrm>
+          <a:prstGeom prst="rect">
+            <a:avLst/>
+          </a:prstGeom>
+          <a:noFill/>
+        </p:spPr>
+        <p:txBody>
+          <a:bodyPr wrap="square" lIns="54864" rIns="54864" tIns="54864" bIns="54864" anchor="ctr">
+            <a:normAutofit/>
+          </a:bodyPr>
+          <a:lstStyle/>
+          <a:p>
+            <a:pPr algn="ctr"/>
+            <a:r>
+              <a:rPr sz="1300" b="1">
+                <a:solidFill>
+                  <a:srgbClr val="FFFFFF"/>
+                </a:solidFill>
+                <a:latin typeface="Aptos"/>
+              </a:rPr>
+              <a:t>manager-led War Room</a:t>
+            </a:r>
+          </a:p>
+        </p:txBody>
+      </p:sp>
+      <p:sp>
+        <p:nvSpPr>
+          <p:cNvPr id="14" name="Rounded Rectangle 13"/>
+          <p:cNvSpPr/>
+          <p:nvPr/>
+        </p:nvSpPr>
+        <p:spPr>
+          <a:xfrm>
+            <a:off x="9217152" y="1965960"/>
+            <a:ext cx="2606040" cy="1508760"/>
+          </a:xfrm>
+          <a:prstGeom prst="roundRect">
+            <a:avLst/>
+          </a:prstGeom>
+          <a:solidFill>
+            <a:srgbClr val="142C4D"/>
+          </a:solidFill>
+          <a:ln w="15240">
+            <a:solidFill>
+              <a:srgbClr val="28547E"/>
+            </a:solidFill>
+          </a:ln>
+        </p:spPr>
+        <p:style>
+          <a:lnRef idx="1">
+            <a:schemeClr val="accent1"/>
+          </a:lnRef>
+          <a:fillRef idx="3">
+            <a:schemeClr val="accent1"/>
+          </a:fillRef>
+          <a:effectRef idx="2">
+            <a:schemeClr val="accent1"/>
+          </a:effectRef>
+          <a:fontRef idx="minor">
+            <a:schemeClr val="lt1"/>
+          </a:fontRef>
+        </p:style>
+        <p:txBody>
+          <a:bodyPr rtlCol="0" anchor="ctr"/>
+          <a:lstStyle/>
+          <a:p>
+            <a:pPr algn="ctr"/>
+          </a:p>
+        </p:txBody>
+      </p:sp>
+      <p:sp>
+        <p:nvSpPr>
+          <p:cNvPr id="15" name="TextBox 14"/>
+          <p:cNvSpPr txBox="1"/>
+          <p:nvPr/>
+        </p:nvSpPr>
+        <p:spPr>
+          <a:xfrm>
+            <a:off x="9381744" y="2148840"/>
+            <a:ext cx="2240280" cy="566928"/>
+          </a:xfrm>
+          <a:prstGeom prst="rect">
+            <a:avLst/>
+          </a:prstGeom>
+          <a:noFill/>
+        </p:spPr>
+        <p:txBody>
+          <a:bodyPr wrap="square" lIns="54864" rIns="54864" tIns="54864" bIns="54864" anchor="ctr">
+            <a:normAutofit/>
+          </a:bodyPr>
+          <a:lstStyle/>
+          <a:p>
+            <a:pPr algn="ctr"/>
+            <a:r>
+              <a:rPr sz="3000" b="1">
+                <a:solidFill>
+                  <a:srgbClr val="65B5F6"/>
+                </a:solidFill>
+                <a:latin typeface="Aptos"/>
+              </a:rPr>
+              <a:t>0–1</a:t>
+            </a:r>
+          </a:p>
+        </p:txBody>
+      </p:sp>
+      <p:sp>
+        <p:nvSpPr>
+          <p:cNvPr id="16" name="TextBox 15"/>
+          <p:cNvSpPr txBox="1"/>
+          <p:nvPr/>
+        </p:nvSpPr>
+        <p:spPr>
+          <a:xfrm>
+            <a:off x="9381744" y="2779776"/>
+            <a:ext cx="2240280" cy="310896"/>
+          </a:xfrm>
+          <a:prstGeom prst="rect">
+            <a:avLst/>
+          </a:prstGeom>
+          <a:noFill/>
+        </p:spPr>
+        <p:txBody>
+          <a:bodyPr wrap="square" lIns="54864" rIns="54864" tIns="54864" bIns="54864" anchor="ctr">
+            <a:normAutofit/>
+          </a:bodyPr>
+          <a:lstStyle/>
+          <a:p>
+            <a:pPr algn="ctr"/>
+            <a:r>
+              <a:rPr sz="1300" b="1">
+                <a:solidFill>
+                  <a:srgbClr val="FFFFFF"/>
+                </a:solidFill>
+                <a:latin typeface="Aptos"/>
+              </a:rPr>
+              <a:t>Container App replicas</a:t>
+            </a:r>
+          </a:p>
+        </p:txBody>
+      </p:sp>
+      <p:sp>
+        <p:nvSpPr>
+          <p:cNvPr id="17" name="TextBox 16"/>
+          <p:cNvSpPr txBox="1"/>
+          <p:nvPr/>
+        </p:nvSpPr>
+        <p:spPr>
+          <a:xfrm>
+            <a:off x="685800" y="4069080"/>
+            <a:ext cx="1097280" cy="256032"/>
+          </a:xfrm>
+          <a:prstGeom prst="rect">
+            <a:avLst/>
+          </a:prstGeom>
+          <a:noFill/>
+        </p:spPr>
+        <p:txBody>
+          <a:bodyPr wrap="square" lIns="54864" rIns="54864" tIns="54864" bIns="54864" anchor="ctr">
+            <a:normAutofit/>
+          </a:bodyPr>
+          <a:lstStyle/>
+          <a:p>
+            <a:pPr algn="l"/>
+            <a:r>
+              <a:rPr sz="1100" b="1">
+                <a:solidFill>
+                  <a:srgbClr val="65B5F6"/>
+                </a:solidFill>
+                <a:latin typeface="Aptos"/>
+              </a:rPr>
+              <a:t>DELIVERED</a:t>
+            </a:r>
+          </a:p>
+        </p:txBody>
+      </p:sp>
+      <p:sp>
+        <p:nvSpPr>
+          <p:cNvPr id="18" name="TextBox 17"/>
+          <p:cNvSpPr txBox="1"/>
+          <p:nvPr/>
+        </p:nvSpPr>
+        <p:spPr>
+          <a:xfrm>
+            <a:off x="685800" y="4407408"/>
+            <a:ext cx="7315200" cy="1600200"/>
+          </a:xfrm>
+          <a:prstGeom prst="rect">
+            <a:avLst/>
+          </a:prstGeom>
+          <a:noFill/>
+        </p:spPr>
+        <p:txBody>
+          <a:bodyPr wrap="square">
+            <a:normAutofit/>
+          </a:bodyPr>
+          <a:lstStyle/>
+          <a:p>
+            <a:pPr>
+              <a:spcAft>
+                <a:spcPts val="1000"/>
+              </a:spcAft>
+              <a:defRPr sz="1600">
+                <a:solidFill>
+                  <a:srgbClr val="FFFFFF"/>
+                </a:solidFill>
+                <a:latin typeface="Aptos"/>
+              </a:defRPr>
+            </a:pPr>
+            <a:r>
+              <a:t>•  Individual cited guidance with evidence-strength and uncertainty signals</a:t>
+            </a:r>
+          </a:p>
+          <a:p>
+            <a:pPr>
+              <a:spcAft>
+                <a:spcPts val="1000"/>
+              </a:spcAft>
+              <a:defRPr sz="1600">
+                <a:solidFill>
+                  <a:srgbClr val="FFFFFF"/>
+                </a:solidFill>
+                <a:latin typeface="Aptos"/>
+              </a:defRPr>
+            </a:pPr>
+            <a:r>
+              <a:t>•  Eleven-person War Room with challenges, dissent, risks, and owned actions</a:t>
+            </a:r>
+          </a:p>
+          <a:p>
+            <a:pPr>
+              <a:spcAft>
+                <a:spcPts val="1000"/>
+              </a:spcAft>
+              <a:defRPr sz="1600">
+                <a:solidFill>
+                  <a:srgbClr val="FFFFFF"/>
+                </a:solidFill>
+                <a:latin typeface="Aptos"/>
+              </a:defRPr>
+            </a:pPr>
+            <a:r>
+              <a:t>•  Managed-identity Azure OpenAI access—no API key in the image or infrastructure</a:t>
+            </a:r>
+          </a:p>
+          <a:p>
+            <a:pPr>
+              <a:spcAft>
+                <a:spcPts val="1000"/>
+              </a:spcAft>
+              <a:defRPr sz="1600">
+                <a:solidFill>
+                  <a:srgbClr val="FFFFFF"/>
+                </a:solidFill>
+                <a:latin typeface="Aptos"/>
+              </a:defRPr>
+            </a:pPr>
+            <a:r>
+              <a:t>•  Scale-to-zero hosting with an estimated fixed infrastructure cost of about $5/month</a:t>
+            </a:r>
+          </a:p>
+        </p:txBody>
+      </p:sp>
+      <p:sp>
+        <p:nvSpPr>
+          <p:cNvPr id="19" name="Rounded Rectangle 18"/>
+          <p:cNvSpPr/>
+          <p:nvPr/>
+        </p:nvSpPr>
+        <p:spPr>
+          <a:xfrm>
+            <a:off x="8458200" y="4069080"/>
+            <a:ext cx="3063240" cy="1627632"/>
+          </a:xfrm>
+          <a:prstGeom prst="roundRect">
+            <a:avLst/>
+          </a:prstGeom>
+          <a:solidFill>
+            <a:srgbClr val="0D3858"/>
+          </a:solidFill>
+          <a:ln w="15240">
+            <a:solidFill>
+              <a:srgbClr val="278EC8"/>
+            </a:solidFill>
+          </a:ln>
+        </p:spPr>
+        <p:style>
+          <a:lnRef idx="1">
+            <a:schemeClr val="accent1"/>
+          </a:lnRef>
+          <a:fillRef idx="3">
+            <a:schemeClr val="accent1"/>
+          </a:fillRef>
+          <a:effectRef idx="2">
+            <a:schemeClr val="accent1"/>
+          </a:effectRef>
+          <a:fontRef idx="minor">
+            <a:schemeClr val="lt1"/>
+          </a:fontRef>
+        </p:style>
+        <p:txBody>
+          <a:bodyPr rtlCol="0" anchor="ctr"/>
+          <a:lstStyle/>
+          <a:p>
+            <a:pPr algn="ctr"/>
+          </a:p>
+        </p:txBody>
+      </p:sp>
+      <p:sp>
+        <p:nvSpPr>
+          <p:cNvPr id="20" name="TextBox 19"/>
+          <p:cNvSpPr txBox="1"/>
+          <p:nvPr/>
+        </p:nvSpPr>
+        <p:spPr>
+          <a:xfrm>
+            <a:off x="8732520" y="4315968"/>
+            <a:ext cx="640080" cy="274320"/>
+          </a:xfrm>
+          <a:prstGeom prst="rect">
+            <a:avLst/>
+          </a:prstGeom>
+          <a:noFill/>
+        </p:spPr>
+        <p:txBody>
+          <a:bodyPr wrap="square" lIns="54864" rIns="54864" tIns="54864" bIns="54864" anchor="ctr">
+            <a:normAutofit/>
+          </a:bodyPr>
+          <a:lstStyle/>
+          <a:p>
+            <a:pPr algn="l"/>
+            <a:r>
+              <a:rPr sz="1100" b="1">
+                <a:solidFill>
+                  <a:srgbClr val="8DE1D6"/>
+                </a:solidFill>
+                <a:latin typeface="Aptos"/>
+              </a:rPr>
+              <a:t>LIVE</a:t>
+            </a:r>
+          </a:p>
+        </p:txBody>
+      </p:sp>
+      <p:sp>
+        <p:nvSpPr>
+          <p:cNvPr id="21" name="TextBox 20"/>
+          <p:cNvSpPr txBox="1"/>
+          <p:nvPr/>
+        </p:nvSpPr>
+        <p:spPr>
+          <a:xfrm>
+            <a:off x="8732520" y="4681728"/>
+            <a:ext cx="2468880" cy="365760"/>
+          </a:xfrm>
+          <a:prstGeom prst="rect">
+            <a:avLst/>
+          </a:prstGeom>
+          <a:noFill/>
+        </p:spPr>
+        <p:txBody>
+          <a:bodyPr wrap="square" lIns="54864" rIns="54864" tIns="54864" bIns="54864" anchor="ctr">
+            <a:normAutofit/>
+          </a:bodyPr>
+          <a:lstStyle/>
+          <a:p>
+            <a:pPr algn="l"/>
+            <a:r>
+              <a:rPr sz="1900" b="1">
+                <a:solidFill>
+                  <a:srgbClr val="FFFFFF"/>
+                </a:solidFill>
+                <a:latin typeface="Aptos"/>
+              </a:rPr>
+              <a:t>Azure Container Apps</a:t>
+            </a:r>
+          </a:p>
+        </p:txBody>
+      </p:sp>
+      <p:sp>
+        <p:nvSpPr>
+          <p:cNvPr id="22" name="TextBox 21"/>
+          <p:cNvSpPr txBox="1"/>
+          <p:nvPr/>
+        </p:nvSpPr>
+        <p:spPr>
+          <a:xfrm>
+            <a:off x="8732520" y="5074920"/>
+            <a:ext cx="2423160" cy="384048"/>
+          </a:xfrm>
+          <a:prstGeom prst="rect">
+            <a:avLst/>
+          </a:prstGeom>
+          <a:noFill/>
+        </p:spPr>
+        <p:txBody>
+          <a:bodyPr wrap="square" lIns="54864" rIns="54864" tIns="54864" bIns="54864" anchor="ctr">
+            <a:normAutofit/>
+          </a:bodyPr>
+          <a:lstStyle/>
+          <a:p>
+            <a:pPr algn="l"/>
+            <a:r>
+              <a:rPr sz="1200" b="0">
+                <a:solidFill>
+                  <a:srgbClr val="B9D8F4"/>
+                </a:solidFill>
+                <a:latin typeface="Aptos"/>
+              </a:rPr>
+              <a:t>East US · public hackathon endpoint</a:t>
+            </a:r>
+          </a:p>
+        </p:txBody>
+      </p:sp>
+      <p:sp>
+        <p:nvSpPr>
+          <p:cNvPr id="23" name="TextBox 22"/>
+          <p:cNvSpPr txBox="1"/>
+          <p:nvPr/>
+        </p:nvSpPr>
+        <p:spPr>
+          <a:xfrm>
+            <a:off x="594360" y="6519672"/>
+            <a:ext cx="4114800" cy="164592"/>
+          </a:xfrm>
+          <a:prstGeom prst="rect">
+            <a:avLst/>
+          </a:prstGeom>
+          <a:noFill/>
+        </p:spPr>
+        <p:txBody>
+          <a:bodyPr wrap="square" lIns="54864" rIns="54864" tIns="54864" bIns="54864" anchor="ctr">
+            <a:normAutofit/>
+          </a:bodyPr>
+          <a:lstStyle/>
+          <a:p>
+            <a:pPr algn="l"/>
+            <a:r>
+              <a:rPr sz="800" b="1">
+                <a:solidFill>
+                  <a:srgbClr val="5E6B82"/>
+                </a:solidFill>
+                <a:latin typeface="Aptos"/>
+              </a:rPr>
+              <a:t>EXPERTTWIN · HACKATHON DEMO</a:t>
+            </a:r>
+          </a:p>
+        </p:txBody>
+      </p:sp>
+      <p:sp>
+        <p:nvSpPr>
+          <p:cNvPr id="24" name="TextBox 23"/>
+          <p:cNvSpPr txBox="1"/>
+          <p:nvPr/>
+        </p:nvSpPr>
+        <p:spPr>
+          <a:xfrm>
+            <a:off x="11201400" y="6492240"/>
+            <a:ext cx="411480" cy="201168"/>
+          </a:xfrm>
+          <a:prstGeom prst="rect">
+            <a:avLst/>
+          </a:prstGeom>
+          <a:noFill/>
+        </p:spPr>
+        <p:txBody>
+          <a:bodyPr wrap="square" lIns="54864" rIns="54864" tIns="54864" bIns="54864" anchor="ctr">
+            <a:normAutofit/>
+          </a:bodyPr>
+          <a:lstStyle/>
+          <a:p>
+            <a:pPr algn="r"/>
+            <a:r>
+              <a:rPr sz="900" b="1">
+                <a:solidFill>
+                  <a:srgbClr val="5E6B82"/>
+                </a:solidFill>
+                <a:latin typeface="Aptos"/>
+              </a:rPr>
+              <a:t>10</a:t>
+            </a:r>
+          </a:p>
+        </p:txBody>
+      </p:sp>
+    </p:spTree>
+  </p:cSld>
+  <p:clrMapOvr>
+    <a:masterClrMapping/>
+  </p:clrMapOvr>
+</p:sld>
+</file>
+
+<file path=ppt/slides/slide11.xml><?xml version="1.0" encoding="utf-8"?>
+<p:sld xmlns:a="http://schemas.openxmlformats.org/drawingml/2006/main" xmlns:p="http://schemas.openxmlformats.org/presentationml/2006/main" xmlns:r="http://schemas.openxmlformats.org/officeDocument/2006/relationships">
+  <p:cSld>
+    <p:bg>
+      <p:bgPr>
+        <a:solidFill>
           <a:srgbClr val="FFFFFF"/>
         </a:solidFill>
         <a:effectLst/>
@@ -4343,7 +5277,7 @@
                 </a:solidFill>
                 <a:latin typeface="Aptos"/>
               </a:rPr>
-              <a:t>10</a:t>
+              <a:t>11</a:t>
             </a:r>
           </a:p>
         </p:txBody>
@@ -4356,7 +5290,7 @@
 </p:sld>
 </file>
 
-<file path=ppt/slides/slide11.xml><?xml version="1.0" encoding="utf-8"?>
+<file path=ppt/slides/slide12.xml><?xml version="1.0" encoding="utf-8"?>
 <p:sld xmlns:a="http://schemas.openxmlformats.org/drawingml/2006/main" xmlns:p="http://schemas.openxmlformats.org/presentationml/2006/main" xmlns:r="http://schemas.openxmlformats.org/officeDocument/2006/relationships">
   <p:cSld>
     <p:bg>
@@ -5209,7 +6143,7 @@
                 </a:solidFill>
                 <a:latin typeface="Aptos"/>
               </a:rPr>
-              <a:t>11</a:t>
+              <a:t>12</a:t>
             </a:r>
           </a:p>
         </p:txBody>
@@ -7154,1315 +8088,30 @@
         <p:nvPr/>
       </p:nvGrpSpPr>
       <p:grpSpPr/>
-      <p:sp>
-        <p:nvSpPr>
-          <p:cNvPr id="2" name="TextBox 1"/>
-          <p:cNvSpPr txBox="1"/>
-          <p:nvPr/>
-        </p:nvSpPr>
-        <p:spPr>
-          <a:xfrm>
-            <a:off x="594360" y="292608"/>
-            <a:ext cx="10972800" cy="320040"/>
-          </a:xfrm>
-          <a:prstGeom prst="rect">
-            <a:avLst/>
-          </a:prstGeom>
-          <a:noFill/>
-        </p:spPr>
-        <p:txBody>
-          <a:bodyPr wrap="square" lIns="54864" rIns="54864" tIns="54864" bIns="54864" anchor="ctr">
-            <a:normAutofit/>
-          </a:bodyPr>
-          <a:lstStyle/>
-          <a:p>
-            <a:pPr algn="l"/>
-            <a:r>
-              <a:rPr sz="1100" b="1">
-                <a:solidFill>
-                  <a:srgbClr val="0078D4"/>
-                </a:solidFill>
-                <a:latin typeface="Aptos"/>
-              </a:rPr>
-              <a:t>EVIDENCE MODEL</a:t>
-            </a:r>
-          </a:p>
-        </p:txBody>
-      </p:sp>
-      <p:sp>
-        <p:nvSpPr>
-          <p:cNvPr id="3" name="TextBox 2"/>
-          <p:cNvSpPr txBox="1"/>
-          <p:nvPr/>
-        </p:nvSpPr>
-        <p:spPr>
-          <a:xfrm>
-            <a:off x="594360" y="621792"/>
-            <a:ext cx="10972800" cy="658368"/>
-          </a:xfrm>
-          <a:prstGeom prst="rect">
-            <a:avLst/>
-          </a:prstGeom>
-          <a:noFill/>
-        </p:spPr>
-        <p:txBody>
-          <a:bodyPr wrap="square" lIns="54864" rIns="54864" tIns="54864" bIns="54864" anchor="ctr">
-            <a:normAutofit/>
-          </a:bodyPr>
-          <a:lstStyle/>
-          <a:p>
-            <a:pPr algn="l"/>
-            <a:r>
-              <a:rPr sz="2800" b="1">
-                <a:solidFill>
-                  <a:srgbClr val="0B1F3A"/>
-                </a:solidFill>
-                <a:latin typeface="Aptos"/>
-              </a:rPr>
-              <a:t>A body of work becomes attributable decision intelligence.</a:t>
-            </a:r>
-          </a:p>
-        </p:txBody>
-      </p:sp>
-      <p:sp>
-        <p:nvSpPr>
-          <p:cNvPr id="4" name="TextBox 3"/>
-          <p:cNvSpPr txBox="1"/>
-          <p:nvPr/>
-        </p:nvSpPr>
-        <p:spPr>
-          <a:xfrm>
-            <a:off x="612648" y="1252728"/>
-            <a:ext cx="10698480" cy="438912"/>
-          </a:xfrm>
-          <a:prstGeom prst="rect">
-            <a:avLst/>
-          </a:prstGeom>
-          <a:noFill/>
-        </p:spPr>
-        <p:txBody>
-          <a:bodyPr wrap="square" lIns="54864" rIns="54864" tIns="54864" bIns="54864" anchor="ctr">
-            <a:normAutofit/>
-          </a:bodyPr>
-          <a:lstStyle/>
-          <a:p>
-            <a:pPr algn="l"/>
-            <a:r>
-              <a:rPr sz="1400" b="0">
-                <a:solidFill>
-                  <a:srgbClr val="5E6B82"/>
-                </a:solidFill>
-                <a:latin typeface="Aptos"/>
-              </a:rPr>
-              <a:t>The system preserves provenance instead of flattening every source into anonymous text chunks.</a:t>
-            </a:r>
-          </a:p>
-        </p:txBody>
-      </p:sp>
-      <p:sp>
-        <p:nvSpPr>
-          <p:cNvPr id="5" name="TextBox 4"/>
-          <p:cNvSpPr txBox="1"/>
-          <p:nvPr/>
-        </p:nvSpPr>
-        <p:spPr>
-          <a:xfrm>
-            <a:off x="640080" y="1874519"/>
-            <a:ext cx="2194560" cy="274320"/>
-          </a:xfrm>
-          <a:prstGeom prst="rect">
-            <a:avLst/>
-          </a:prstGeom>
-          <a:noFill/>
-        </p:spPr>
-        <p:txBody>
-          <a:bodyPr wrap="square" lIns="54864" rIns="54864" tIns="54864" bIns="54864" anchor="ctr">
-            <a:normAutofit/>
-          </a:bodyPr>
-          <a:lstStyle/>
-          <a:p>
-            <a:pPr algn="l"/>
-            <a:r>
-              <a:rPr sz="1100" b="1">
-                <a:solidFill>
-                  <a:srgbClr val="0078D4"/>
-                </a:solidFill>
-                <a:latin typeface="Aptos"/>
-              </a:rPr>
-              <a:t>ENTERPRISE SIGNALS</a:t>
-            </a:r>
-          </a:p>
-        </p:txBody>
-      </p:sp>
-      <p:sp>
-        <p:nvSpPr>
-          <p:cNvPr id="6" name="Rounded Rectangle 5"/>
-          <p:cNvSpPr/>
-          <p:nvPr/>
-        </p:nvSpPr>
-        <p:spPr>
-          <a:xfrm>
-            <a:off x="640080" y="2267712"/>
-            <a:ext cx="2331720" cy="457200"/>
-          </a:xfrm>
-          <a:prstGeom prst="roundRect">
-            <a:avLst/>
-          </a:prstGeom>
-          <a:solidFill>
-            <a:srgbClr val="FFFFFF"/>
-          </a:solidFill>
-          <a:ln w="15240">
-            <a:solidFill>
-              <a:srgbClr val="C8D5E6"/>
-            </a:solidFill>
-          </a:ln>
-        </p:spPr>
-        <p:style>
-          <a:lnRef idx="1">
-            <a:schemeClr val="accent1"/>
-          </a:lnRef>
-          <a:fillRef idx="3">
-            <a:schemeClr val="accent1"/>
-          </a:fillRef>
-          <a:effectRef idx="2">
-            <a:schemeClr val="accent1"/>
-          </a:effectRef>
-          <a:fontRef idx="minor">
-            <a:schemeClr val="lt1"/>
-          </a:fontRef>
-        </p:style>
-        <p:txBody>
-          <a:bodyPr rtlCol="0" anchor="ctr"/>
-          <a:lstStyle/>
-          <a:p>
-            <a:pPr algn="ctr"/>
-          </a:p>
-        </p:txBody>
-      </p:sp>
-      <p:sp>
-        <p:nvSpPr>
-          <p:cNvPr id="7" name="TextBox 6"/>
-          <p:cNvSpPr txBox="1"/>
-          <p:nvPr/>
-        </p:nvSpPr>
-        <p:spPr>
-          <a:xfrm>
-            <a:off x="841248" y="2304288"/>
-            <a:ext cx="1920240" cy="347472"/>
-          </a:xfrm>
-          <a:prstGeom prst="rect">
-            <a:avLst/>
-          </a:prstGeom>
-          <a:noFill/>
-        </p:spPr>
-        <p:txBody>
-          <a:bodyPr wrap="square" lIns="54864" rIns="54864" tIns="54864" bIns="54864" anchor="ctr">
-            <a:normAutofit/>
-          </a:bodyPr>
-          <a:lstStyle/>
-          <a:p>
-            <a:pPr algn="l"/>
-            <a:r>
-              <a:rPr sz="1300" b="1">
-                <a:solidFill>
-                  <a:srgbClr val="17233C"/>
-                </a:solidFill>
-                <a:latin typeface="Aptos"/>
-              </a:rPr>
-              <a:t>Design reviews</a:t>
-            </a:r>
-          </a:p>
-        </p:txBody>
-      </p:sp>
-      <p:sp>
-        <p:nvSpPr>
-          <p:cNvPr id="8" name="Rounded Rectangle 7"/>
-          <p:cNvSpPr/>
-          <p:nvPr/>
-        </p:nvSpPr>
-        <p:spPr>
-          <a:xfrm>
-            <a:off x="640080" y="2880360"/>
-            <a:ext cx="2331720" cy="457200"/>
-          </a:xfrm>
-          <a:prstGeom prst="roundRect">
-            <a:avLst/>
-          </a:prstGeom>
-          <a:solidFill>
-            <a:srgbClr val="FFFFFF"/>
-          </a:solidFill>
-          <a:ln w="15240">
-            <a:solidFill>
-              <a:srgbClr val="C8D5E6"/>
-            </a:solidFill>
-          </a:ln>
-        </p:spPr>
-        <p:style>
-          <a:lnRef idx="1">
-            <a:schemeClr val="accent1"/>
-          </a:lnRef>
-          <a:fillRef idx="3">
-            <a:schemeClr val="accent1"/>
-          </a:fillRef>
-          <a:effectRef idx="2">
-            <a:schemeClr val="accent1"/>
-          </a:effectRef>
-          <a:fontRef idx="minor">
-            <a:schemeClr val="lt1"/>
-          </a:fontRef>
-        </p:style>
-        <p:txBody>
-          <a:bodyPr rtlCol="0" anchor="ctr"/>
-          <a:lstStyle/>
-          <a:p>
-            <a:pPr algn="ctr"/>
-          </a:p>
-        </p:txBody>
-      </p:sp>
-      <p:sp>
-        <p:nvSpPr>
-          <p:cNvPr id="9" name="TextBox 8"/>
-          <p:cNvSpPr txBox="1"/>
-          <p:nvPr/>
-        </p:nvSpPr>
-        <p:spPr>
-          <a:xfrm>
-            <a:off x="841248" y="2916936"/>
-            <a:ext cx="1920240" cy="347472"/>
-          </a:xfrm>
-          <a:prstGeom prst="rect">
-            <a:avLst/>
-          </a:prstGeom>
-          <a:noFill/>
-        </p:spPr>
-        <p:txBody>
-          <a:bodyPr wrap="square" lIns="54864" rIns="54864" tIns="54864" bIns="54864" anchor="ctr">
-            <a:normAutofit/>
-          </a:bodyPr>
-          <a:lstStyle/>
-          <a:p>
-            <a:pPr algn="l"/>
-            <a:r>
-              <a:rPr sz="1300" b="1">
-                <a:solidFill>
-                  <a:srgbClr val="17233C"/>
-                </a:solidFill>
-                <a:latin typeface="Aptos"/>
-              </a:rPr>
-              <a:t>Meeting turns</a:t>
-            </a:r>
-          </a:p>
-        </p:txBody>
-      </p:sp>
-      <p:sp>
-        <p:nvSpPr>
-          <p:cNvPr id="10" name="Rounded Rectangle 9"/>
-          <p:cNvSpPr/>
-          <p:nvPr/>
-        </p:nvSpPr>
-        <p:spPr>
-          <a:xfrm>
-            <a:off x="640080" y="3493008"/>
-            <a:ext cx="2331720" cy="457200"/>
-          </a:xfrm>
-          <a:prstGeom prst="roundRect">
-            <a:avLst/>
-          </a:prstGeom>
-          <a:solidFill>
-            <a:srgbClr val="FFFFFF"/>
-          </a:solidFill>
-          <a:ln w="15240">
-            <a:solidFill>
-              <a:srgbClr val="C8D5E6"/>
-            </a:solidFill>
-          </a:ln>
-        </p:spPr>
-        <p:style>
-          <a:lnRef idx="1">
-            <a:schemeClr val="accent1"/>
-          </a:lnRef>
-          <a:fillRef idx="3">
-            <a:schemeClr val="accent1"/>
-          </a:fillRef>
-          <a:effectRef idx="2">
-            <a:schemeClr val="accent1"/>
-          </a:effectRef>
-          <a:fontRef idx="minor">
-            <a:schemeClr val="lt1"/>
-          </a:fontRef>
-        </p:style>
-        <p:txBody>
-          <a:bodyPr rtlCol="0" anchor="ctr"/>
-          <a:lstStyle/>
-          <a:p>
-            <a:pPr algn="ctr"/>
-          </a:p>
-        </p:txBody>
-      </p:sp>
-      <p:sp>
-        <p:nvSpPr>
-          <p:cNvPr id="11" name="TextBox 10"/>
-          <p:cNvSpPr txBox="1"/>
-          <p:nvPr/>
-        </p:nvSpPr>
-        <p:spPr>
-          <a:xfrm>
-            <a:off x="841248" y="3529584"/>
-            <a:ext cx="1920240" cy="347472"/>
-          </a:xfrm>
-          <a:prstGeom prst="rect">
-            <a:avLst/>
-          </a:prstGeom>
-          <a:noFill/>
-        </p:spPr>
-        <p:txBody>
-          <a:bodyPr wrap="square" lIns="54864" rIns="54864" tIns="54864" bIns="54864" anchor="ctr">
-            <a:normAutofit/>
-          </a:bodyPr>
-          <a:lstStyle/>
-          <a:p>
-            <a:pPr algn="l"/>
-            <a:r>
-              <a:rPr sz="1300" b="1">
-                <a:solidFill>
-                  <a:srgbClr val="17233C"/>
-                </a:solidFill>
-                <a:latin typeface="Aptos"/>
-              </a:rPr>
-              <a:t>Engineering chat</a:t>
-            </a:r>
-          </a:p>
-        </p:txBody>
-      </p:sp>
-      <p:sp>
-        <p:nvSpPr>
-          <p:cNvPr id="12" name="Rounded Rectangle 11"/>
-          <p:cNvSpPr/>
-          <p:nvPr/>
-        </p:nvSpPr>
-        <p:spPr>
-          <a:xfrm>
-            <a:off x="640080" y="4105656"/>
-            <a:ext cx="2331720" cy="457200"/>
-          </a:xfrm>
-          <a:prstGeom prst="roundRect">
-            <a:avLst/>
-          </a:prstGeom>
-          <a:solidFill>
-            <a:srgbClr val="FFFFFF"/>
-          </a:solidFill>
-          <a:ln w="15240">
-            <a:solidFill>
-              <a:srgbClr val="C8D5E6"/>
-            </a:solidFill>
-          </a:ln>
-        </p:spPr>
-        <p:style>
-          <a:lnRef idx="1">
-            <a:schemeClr val="accent1"/>
-          </a:lnRef>
-          <a:fillRef idx="3">
-            <a:schemeClr val="accent1"/>
-          </a:fillRef>
-          <a:effectRef idx="2">
-            <a:schemeClr val="accent1"/>
-          </a:effectRef>
-          <a:fontRef idx="minor">
-            <a:schemeClr val="lt1"/>
-          </a:fontRef>
-        </p:style>
-        <p:txBody>
-          <a:bodyPr rtlCol="0" anchor="ctr"/>
-          <a:lstStyle/>
-          <a:p>
-            <a:pPr algn="ctr"/>
-          </a:p>
-        </p:txBody>
-      </p:sp>
-      <p:sp>
-        <p:nvSpPr>
-          <p:cNvPr id="13" name="TextBox 12"/>
-          <p:cNvSpPr txBox="1"/>
-          <p:nvPr/>
-        </p:nvSpPr>
-        <p:spPr>
-          <a:xfrm>
-            <a:off x="841248" y="4142232"/>
-            <a:ext cx="1920240" cy="347472"/>
-          </a:xfrm>
-          <a:prstGeom prst="rect">
-            <a:avLst/>
-          </a:prstGeom>
-          <a:noFill/>
-        </p:spPr>
-        <p:txBody>
-          <a:bodyPr wrap="square" lIns="54864" rIns="54864" tIns="54864" bIns="54864" anchor="ctr">
-            <a:normAutofit/>
-          </a:bodyPr>
-          <a:lstStyle/>
-          <a:p>
-            <a:pPr algn="l"/>
-            <a:r>
-              <a:rPr sz="1300" b="1">
-                <a:solidFill>
-                  <a:srgbClr val="17233C"/>
-                </a:solidFill>
-                <a:latin typeface="Aptos"/>
-              </a:rPr>
-              <a:t>Incidents</a:t>
-            </a:r>
-          </a:p>
-        </p:txBody>
-      </p:sp>
-      <p:sp>
-        <p:nvSpPr>
-          <p:cNvPr id="14" name="Rounded Rectangle 13"/>
-          <p:cNvSpPr/>
-          <p:nvPr/>
-        </p:nvSpPr>
-        <p:spPr>
-          <a:xfrm>
-            <a:off x="640080" y="4718304"/>
-            <a:ext cx="2331720" cy="457200"/>
-          </a:xfrm>
-          <a:prstGeom prst="roundRect">
-            <a:avLst/>
-          </a:prstGeom>
-          <a:solidFill>
-            <a:srgbClr val="FFFFFF"/>
-          </a:solidFill>
-          <a:ln w="15240">
-            <a:solidFill>
-              <a:srgbClr val="C8D5E6"/>
-            </a:solidFill>
-          </a:ln>
-        </p:spPr>
-        <p:style>
-          <a:lnRef idx="1">
-            <a:schemeClr val="accent1"/>
-          </a:lnRef>
-          <a:fillRef idx="3">
-            <a:schemeClr val="accent1"/>
-          </a:fillRef>
-          <a:effectRef idx="2">
-            <a:schemeClr val="accent1"/>
-          </a:effectRef>
-          <a:fontRef idx="minor">
-            <a:schemeClr val="lt1"/>
-          </a:fontRef>
-        </p:style>
-        <p:txBody>
-          <a:bodyPr rtlCol="0" anchor="ctr"/>
-          <a:lstStyle/>
-          <a:p>
-            <a:pPr algn="ctr"/>
-          </a:p>
-        </p:txBody>
-      </p:sp>
-      <p:sp>
-        <p:nvSpPr>
-          <p:cNvPr id="15" name="TextBox 14"/>
-          <p:cNvSpPr txBox="1"/>
-          <p:nvPr/>
-        </p:nvSpPr>
-        <p:spPr>
-          <a:xfrm>
-            <a:off x="841248" y="4754880"/>
-            <a:ext cx="1920240" cy="347472"/>
-          </a:xfrm>
-          <a:prstGeom prst="rect">
-            <a:avLst/>
-          </a:prstGeom>
-          <a:noFill/>
-        </p:spPr>
-        <p:txBody>
-          <a:bodyPr wrap="square" lIns="54864" rIns="54864" tIns="54864" bIns="54864" anchor="ctr">
-            <a:normAutofit/>
-          </a:bodyPr>
-          <a:lstStyle/>
-          <a:p>
-            <a:pPr algn="l"/>
-            <a:r>
-              <a:rPr sz="1300" b="1">
-                <a:solidFill>
-                  <a:srgbClr val="17233C"/>
-                </a:solidFill>
-                <a:latin typeface="Aptos"/>
-              </a:rPr>
-              <a:t>ADRs + outcomes</a:t>
-            </a:r>
-          </a:p>
-        </p:txBody>
-      </p:sp>
-      <p:sp>
-        <p:nvSpPr>
-          <p:cNvPr id="16" name="TextBox 15"/>
-          <p:cNvSpPr txBox="1"/>
-          <p:nvPr/>
-        </p:nvSpPr>
-        <p:spPr>
-          <a:xfrm>
-            <a:off x="3657600" y="1874519"/>
-            <a:ext cx="2926080" cy="274320"/>
-          </a:xfrm>
-          <a:prstGeom prst="rect">
-            <a:avLst/>
-          </a:prstGeom>
-          <a:noFill/>
-        </p:spPr>
-        <p:txBody>
-          <a:bodyPr wrap="square" lIns="54864" rIns="54864" tIns="54864" bIns="54864" anchor="ctr">
-            <a:normAutofit/>
-          </a:bodyPr>
-          <a:lstStyle/>
-          <a:p>
-            <a:pPr algn="l"/>
-            <a:r>
-              <a:rPr sz="1100" b="1">
-                <a:solidFill>
-                  <a:srgbClr val="0F9D8B"/>
-                </a:solidFill>
-                <a:latin typeface="Aptos"/>
-              </a:rPr>
-              <a:t>STRUCTURED DECISION RECORD</a:t>
-            </a:r>
-          </a:p>
-        </p:txBody>
-      </p:sp>
-      <p:sp>
-        <p:nvSpPr>
-          <p:cNvPr id="17" name="Rounded Rectangle 16"/>
-          <p:cNvSpPr/>
-          <p:nvPr/>
-        </p:nvSpPr>
-        <p:spPr>
-          <a:xfrm>
-            <a:off x="3611880" y="2267712"/>
-            <a:ext cx="3749039" cy="2944368"/>
-          </a:xfrm>
-          <a:prstGeom prst="roundRect">
-            <a:avLst/>
-          </a:prstGeom>
-          <a:solidFill>
-            <a:srgbClr val="FFFFFF"/>
-          </a:solidFill>
-          <a:ln w="15240">
-            <a:solidFill>
-              <a:srgbClr val="0F9D8B"/>
-            </a:solidFill>
-          </a:ln>
-        </p:spPr>
-        <p:style>
-          <a:lnRef idx="1">
-            <a:schemeClr val="accent1"/>
-          </a:lnRef>
-          <a:fillRef idx="3">
-            <a:schemeClr val="accent1"/>
-          </a:fillRef>
-          <a:effectRef idx="2">
-            <a:schemeClr val="accent1"/>
-          </a:effectRef>
-          <a:fontRef idx="minor">
-            <a:schemeClr val="lt1"/>
-          </a:fontRef>
-        </p:style>
-        <p:txBody>
-          <a:bodyPr rtlCol="0" anchor="ctr"/>
-          <a:lstStyle/>
-          <a:p>
-            <a:pPr algn="ctr"/>
-          </a:p>
-        </p:txBody>
-      </p:sp>
-      <p:sp>
-        <p:nvSpPr>
-          <p:cNvPr id="18" name="TextBox 17"/>
-          <p:cNvSpPr txBox="1"/>
-          <p:nvPr/>
-        </p:nvSpPr>
-        <p:spPr>
-          <a:xfrm>
-            <a:off x="3913632" y="2487168"/>
-            <a:ext cx="3154680" cy="2423160"/>
-          </a:xfrm>
-          <a:prstGeom prst="rect">
-            <a:avLst/>
-          </a:prstGeom>
-          <a:noFill/>
-        </p:spPr>
-        <p:txBody>
-          <a:bodyPr wrap="square">
-            <a:normAutofit/>
-          </a:bodyPr>
-          <a:lstStyle/>
-          <a:p>
-            <a:pPr>
-              <a:spcAft>
-                <a:spcPts val="1000"/>
-              </a:spcAft>
-              <a:defRPr sz="1500">
-                <a:solidFill>
-                  <a:srgbClr val="17233C"/>
-                </a:solidFill>
-                <a:latin typeface="Aptos"/>
-              </a:defRPr>
-            </a:pPr>
-            <a:r>
-              <a:t>•  Expert + role + timestamp</a:t>
-            </a:r>
-          </a:p>
-          <a:p>
-            <a:pPr>
-              <a:spcAft>
-                <a:spcPts val="1000"/>
-              </a:spcAft>
-              <a:defRPr sz="1500">
-                <a:solidFill>
-                  <a:srgbClr val="17233C"/>
-                </a:solidFill>
-                <a:latin typeface="Aptos"/>
-              </a:defRPr>
-            </a:pPr>
-            <a:r>
-              <a:t>•  Choice and alternatives</a:t>
-            </a:r>
-          </a:p>
-          <a:p>
-            <a:pPr>
-              <a:spcAft>
-                <a:spcPts val="1000"/>
-              </a:spcAft>
-              <a:defRPr sz="1500">
-                <a:solidFill>
-                  <a:srgbClr val="17233C"/>
-                </a:solidFill>
-                <a:latin typeface="Aptos"/>
-              </a:defRPr>
-            </a:pPr>
-            <a:r>
-              <a:t>•  Rationale and constraints</a:t>
-            </a:r>
-          </a:p>
-          <a:p>
-            <a:pPr>
-              <a:spcAft>
-                <a:spcPts val="1000"/>
-              </a:spcAft>
-              <a:defRPr sz="1500">
-                <a:solidFill>
-                  <a:srgbClr val="17233C"/>
-                </a:solidFill>
-                <a:latin typeface="Aptos"/>
-              </a:defRPr>
-            </a:pPr>
-            <a:r>
-              <a:t>•  Risks and observed outcome</a:t>
-            </a:r>
-          </a:p>
-          <a:p>
-            <a:pPr>
-              <a:spcAft>
-                <a:spcPts val="1000"/>
-              </a:spcAft>
-              <a:defRPr sz="1500">
-                <a:solidFill>
-                  <a:srgbClr val="17233C"/>
-                </a:solidFill>
-                <a:latin typeface="Aptos"/>
-              </a:defRPr>
-            </a:pPr>
-            <a:r>
-              <a:t>•  Source, segment, thread, confidence</a:t>
-            </a:r>
-          </a:p>
-          <a:p>
-            <a:pPr>
-              <a:spcAft>
-                <a:spcPts val="1000"/>
-              </a:spcAft>
-              <a:defRPr sz="1500">
-                <a:solidFill>
-                  <a:srgbClr val="17233C"/>
-                </a:solidFill>
-                <a:latin typeface="Aptos"/>
-              </a:defRPr>
-            </a:pPr>
-            <a:r>
-              <a:t>•  Simulation and attribution status</a:t>
-            </a:r>
-          </a:p>
-        </p:txBody>
-      </p:sp>
-      <p:sp>
-        <p:nvSpPr>
-          <p:cNvPr id="19" name="TextBox 18"/>
-          <p:cNvSpPr txBox="1"/>
-          <p:nvPr/>
-        </p:nvSpPr>
-        <p:spPr>
-          <a:xfrm>
-            <a:off x="8028431" y="1874519"/>
-            <a:ext cx="2743200" cy="274320"/>
-          </a:xfrm>
-          <a:prstGeom prst="rect">
-            <a:avLst/>
-          </a:prstGeom>
-          <a:noFill/>
-        </p:spPr>
-        <p:txBody>
-          <a:bodyPr wrap="square" lIns="54864" rIns="54864" tIns="54864" bIns="54864" anchor="ctr">
-            <a:normAutofit/>
-          </a:bodyPr>
-          <a:lstStyle/>
-          <a:p>
-            <a:pPr algn="l"/>
-            <a:r>
-              <a:rPr sz="1100" b="1">
-                <a:solidFill>
-                  <a:srgbClr val="5B5BD6"/>
-                </a:solidFill>
-                <a:latin typeface="Aptos"/>
-              </a:rPr>
-              <a:t>DECISION FINGERPRINT</a:t>
-            </a:r>
-          </a:p>
-        </p:txBody>
-      </p:sp>
-      <p:sp>
-        <p:nvSpPr>
-          <p:cNvPr id="20" name="Rounded Rectangle 19"/>
-          <p:cNvSpPr/>
-          <p:nvPr/>
-        </p:nvSpPr>
-        <p:spPr>
-          <a:xfrm>
-            <a:off x="7973568" y="2267712"/>
-            <a:ext cx="3566160" cy="2944368"/>
-          </a:xfrm>
-          <a:prstGeom prst="roundRect">
-            <a:avLst/>
-          </a:prstGeom>
-          <a:solidFill>
-            <a:srgbClr val="F5F1FF"/>
-          </a:solidFill>
-          <a:ln w="15240">
-            <a:solidFill>
-              <a:srgbClr val="5B5BD6"/>
-            </a:solidFill>
-          </a:ln>
-        </p:spPr>
-        <p:style>
-          <a:lnRef idx="1">
-            <a:schemeClr val="accent1"/>
-          </a:lnRef>
-          <a:fillRef idx="3">
-            <a:schemeClr val="accent1"/>
-          </a:fillRef>
-          <a:effectRef idx="2">
-            <a:schemeClr val="accent1"/>
-          </a:effectRef>
-          <a:fontRef idx="minor">
-            <a:schemeClr val="lt1"/>
-          </a:fontRef>
-        </p:style>
-        <p:txBody>
-          <a:bodyPr rtlCol="0" anchor="ctr"/>
-          <a:lstStyle/>
-          <a:p>
-            <a:pPr algn="ctr"/>
-          </a:p>
-        </p:txBody>
-      </p:sp>
-      <p:sp>
-        <p:nvSpPr>
-          <p:cNvPr id="21" name="TextBox 20"/>
-          <p:cNvSpPr txBox="1"/>
-          <p:nvPr/>
-        </p:nvSpPr>
-        <p:spPr>
-          <a:xfrm>
-            <a:off x="8275320" y="2468880"/>
-            <a:ext cx="1508760" cy="320040"/>
-          </a:xfrm>
-          <a:prstGeom prst="rect">
-            <a:avLst/>
-          </a:prstGeom>
-          <a:noFill/>
-        </p:spPr>
-        <p:txBody>
-          <a:bodyPr wrap="square" lIns="54864" rIns="54864" tIns="54864" bIns="54864" anchor="ctr">
-            <a:normAutofit/>
-          </a:bodyPr>
-          <a:lstStyle/>
-          <a:p>
-            <a:pPr algn="l"/>
-            <a:r>
-              <a:rPr sz="1400" b="1">
-                <a:solidFill>
-                  <a:srgbClr val="0B1F3A"/>
-                </a:solidFill>
-                <a:latin typeface="Aptos"/>
-              </a:rPr>
-              <a:t>Trade-off style</a:t>
-            </a:r>
-          </a:p>
-        </p:txBody>
-      </p:sp>
-      <p:sp>
-        <p:nvSpPr>
-          <p:cNvPr id="22" name="TextBox 21"/>
-          <p:cNvSpPr txBox="1"/>
-          <p:nvPr/>
-        </p:nvSpPr>
-        <p:spPr>
-          <a:xfrm>
-            <a:off x="9710928" y="2468880"/>
-            <a:ext cx="1481328" cy="320040"/>
-          </a:xfrm>
-          <a:prstGeom prst="rect">
-            <a:avLst/>
-          </a:prstGeom>
-          <a:noFill/>
-        </p:spPr>
-        <p:txBody>
-          <a:bodyPr wrap="square" lIns="54864" rIns="54864" tIns="54864" bIns="54864" anchor="ctr">
-            <a:normAutofit/>
-          </a:bodyPr>
-          <a:lstStyle/>
-          <a:p>
-            <a:pPr algn="l"/>
-            <a:r>
-              <a:rPr sz="1200" b="0">
-                <a:solidFill>
-                  <a:srgbClr val="5E6B82"/>
-                </a:solidFill>
-                <a:latin typeface="Aptos"/>
-              </a:rPr>
-              <a:t>What gets optimized</a:t>
-            </a:r>
-          </a:p>
-        </p:txBody>
-      </p:sp>
-      <p:sp>
-        <p:nvSpPr>
-          <p:cNvPr id="23" name="TextBox 22"/>
-          <p:cNvSpPr txBox="1"/>
-          <p:nvPr/>
-        </p:nvSpPr>
-        <p:spPr>
-          <a:xfrm>
-            <a:off x="8275320" y="2953512"/>
-            <a:ext cx="1508760" cy="320040"/>
-          </a:xfrm>
-          <a:prstGeom prst="rect">
-            <a:avLst/>
-          </a:prstGeom>
-          <a:noFill/>
-        </p:spPr>
-        <p:txBody>
-          <a:bodyPr wrap="square" lIns="54864" rIns="54864" tIns="54864" bIns="54864" anchor="ctr">
-            <a:normAutofit/>
-          </a:bodyPr>
-          <a:lstStyle/>
-          <a:p>
-            <a:pPr algn="l"/>
-            <a:r>
-              <a:rPr sz="1400" b="1">
-                <a:solidFill>
-                  <a:srgbClr val="0B1F3A"/>
-                </a:solidFill>
-                <a:latin typeface="Aptos"/>
-              </a:rPr>
-              <a:t>Risk posture</a:t>
-            </a:r>
-          </a:p>
-        </p:txBody>
-      </p:sp>
-      <p:sp>
-        <p:nvSpPr>
-          <p:cNvPr id="24" name="TextBox 23"/>
-          <p:cNvSpPr txBox="1"/>
-          <p:nvPr/>
-        </p:nvSpPr>
-        <p:spPr>
-          <a:xfrm>
-            <a:off x="9710928" y="2953512"/>
-            <a:ext cx="1481328" cy="320040"/>
-          </a:xfrm>
-          <a:prstGeom prst="rect">
-            <a:avLst/>
-          </a:prstGeom>
-          <a:noFill/>
-        </p:spPr>
-        <p:txBody>
-          <a:bodyPr wrap="square" lIns="54864" rIns="54864" tIns="54864" bIns="54864" anchor="ctr">
-            <a:normAutofit/>
-          </a:bodyPr>
-          <a:lstStyle/>
-          <a:p>
-            <a:pPr algn="l"/>
-            <a:r>
-              <a:rPr sz="1200" b="0">
-                <a:solidFill>
-                  <a:srgbClr val="5E6B82"/>
-                </a:solidFill>
-                <a:latin typeface="Aptos"/>
-              </a:rPr>
-              <a:t>What must be protected</a:t>
-            </a:r>
-          </a:p>
-        </p:txBody>
-      </p:sp>
-      <p:sp>
-        <p:nvSpPr>
-          <p:cNvPr id="25" name="TextBox 24"/>
-          <p:cNvSpPr txBox="1"/>
-          <p:nvPr/>
-        </p:nvSpPr>
-        <p:spPr>
-          <a:xfrm>
-            <a:off x="8275320" y="3438144"/>
-            <a:ext cx="1508760" cy="320040"/>
-          </a:xfrm>
-          <a:prstGeom prst="rect">
-            <a:avLst/>
-          </a:prstGeom>
-          <a:noFill/>
-        </p:spPr>
-        <p:txBody>
-          <a:bodyPr wrap="square" lIns="54864" rIns="54864" tIns="54864" bIns="54864" anchor="ctr">
-            <a:normAutofit/>
-          </a:bodyPr>
-          <a:lstStyle/>
-          <a:p>
-            <a:pPr algn="l"/>
-            <a:r>
-              <a:rPr sz="1400" b="1">
-                <a:solidFill>
-                  <a:srgbClr val="0B1F3A"/>
-                </a:solidFill>
-                <a:latin typeface="Aptos"/>
-              </a:rPr>
-              <a:t>Selection criteria</a:t>
-            </a:r>
-          </a:p>
-        </p:txBody>
-      </p:sp>
-      <p:sp>
-        <p:nvSpPr>
-          <p:cNvPr id="26" name="TextBox 25"/>
-          <p:cNvSpPr txBox="1"/>
-          <p:nvPr/>
-        </p:nvSpPr>
-        <p:spPr>
-          <a:xfrm>
-            <a:off x="9710928" y="3438144"/>
-            <a:ext cx="1481328" cy="320040"/>
-          </a:xfrm>
-          <a:prstGeom prst="rect">
-            <a:avLst/>
-          </a:prstGeom>
-          <a:noFill/>
-        </p:spPr>
-        <p:txBody>
-          <a:bodyPr wrap="square" lIns="54864" rIns="54864" tIns="54864" bIns="54864" anchor="ctr">
-            <a:normAutofit/>
-          </a:bodyPr>
-          <a:lstStyle/>
-          <a:p>
-            <a:pPr algn="l"/>
-            <a:r>
-              <a:rPr sz="1200" b="0">
-                <a:solidFill>
-                  <a:srgbClr val="5E6B82"/>
-                </a:solidFill>
-                <a:latin typeface="Aptos"/>
-              </a:rPr>
-              <a:t>How technologies are compared</a:t>
-            </a:r>
-          </a:p>
-        </p:txBody>
-      </p:sp>
-      <p:sp>
-        <p:nvSpPr>
-          <p:cNvPr id="27" name="TextBox 26"/>
-          <p:cNvSpPr txBox="1"/>
-          <p:nvPr/>
-        </p:nvSpPr>
-        <p:spPr>
-          <a:xfrm>
-            <a:off x="8275320" y="3922776"/>
-            <a:ext cx="1508760" cy="320040"/>
-          </a:xfrm>
-          <a:prstGeom prst="rect">
-            <a:avLst/>
-          </a:prstGeom>
-          <a:noFill/>
-        </p:spPr>
-        <p:txBody>
-          <a:bodyPr wrap="square" lIns="54864" rIns="54864" tIns="54864" bIns="54864" anchor="ctr">
-            <a:normAutofit/>
-          </a:bodyPr>
-          <a:lstStyle/>
-          <a:p>
-            <a:pPr algn="l"/>
-            <a:r>
-              <a:rPr sz="1400" b="1">
-                <a:solidFill>
-                  <a:srgbClr val="0B1F3A"/>
-                </a:solidFill>
-                <a:latin typeface="Aptos"/>
-              </a:rPr>
-              <a:t>Recovery strategy</a:t>
-            </a:r>
-          </a:p>
-        </p:txBody>
-      </p:sp>
-      <p:sp>
-        <p:nvSpPr>
-          <p:cNvPr id="28" name="TextBox 27"/>
-          <p:cNvSpPr txBox="1"/>
-          <p:nvPr/>
-        </p:nvSpPr>
-        <p:spPr>
-          <a:xfrm>
-            <a:off x="9710928" y="3922776"/>
-            <a:ext cx="1481328" cy="320040"/>
-          </a:xfrm>
-          <a:prstGeom prst="rect">
-            <a:avLst/>
-          </a:prstGeom>
-          <a:noFill/>
-        </p:spPr>
-        <p:txBody>
-          <a:bodyPr wrap="square" lIns="54864" rIns="54864" tIns="54864" bIns="54864" anchor="ctr">
-            <a:normAutofit/>
-          </a:bodyPr>
-          <a:lstStyle/>
-          <a:p>
-            <a:pPr algn="l"/>
-            <a:r>
-              <a:rPr sz="1200" b="0">
-                <a:solidFill>
-                  <a:srgbClr val="5E6B82"/>
-                </a:solidFill>
-                <a:latin typeface="Aptos"/>
-              </a:rPr>
-              <a:t>How failure is handled</a:t>
-            </a:r>
-          </a:p>
-        </p:txBody>
-      </p:sp>
-      <p:sp>
-        <p:nvSpPr>
-          <p:cNvPr id="29" name="TextBox 28"/>
-          <p:cNvSpPr txBox="1"/>
-          <p:nvPr/>
-        </p:nvSpPr>
-        <p:spPr>
-          <a:xfrm>
-            <a:off x="8275320" y="4407408"/>
-            <a:ext cx="1508760" cy="320040"/>
-          </a:xfrm>
-          <a:prstGeom prst="rect">
-            <a:avLst/>
-          </a:prstGeom>
-          <a:noFill/>
-        </p:spPr>
-        <p:txBody>
-          <a:bodyPr wrap="square" lIns="54864" rIns="54864" tIns="54864" bIns="54864" anchor="ctr">
-            <a:normAutofit/>
-          </a:bodyPr>
-          <a:lstStyle/>
-          <a:p>
-            <a:pPr algn="l"/>
-            <a:r>
-              <a:rPr sz="1400" b="1">
-                <a:solidFill>
-                  <a:srgbClr val="0B1F3A"/>
-                </a:solidFill>
-                <a:latin typeface="Aptos"/>
-              </a:rPr>
-              <a:t>Operating principles</a:t>
-            </a:r>
-          </a:p>
-        </p:txBody>
-      </p:sp>
-      <p:sp>
-        <p:nvSpPr>
-          <p:cNvPr id="30" name="TextBox 29"/>
-          <p:cNvSpPr txBox="1"/>
-          <p:nvPr/>
-        </p:nvSpPr>
-        <p:spPr>
-          <a:xfrm>
-            <a:off x="9710928" y="4407408"/>
-            <a:ext cx="1481328" cy="320040"/>
-          </a:xfrm>
-          <a:prstGeom prst="rect">
-            <a:avLst/>
-          </a:prstGeom>
-          <a:noFill/>
-        </p:spPr>
-        <p:txBody>
-          <a:bodyPr wrap="square" lIns="54864" rIns="54864" tIns="54864" bIns="54864" anchor="ctr">
-            <a:normAutofit/>
-          </a:bodyPr>
-          <a:lstStyle/>
-          <a:p>
-            <a:pPr algn="l"/>
-            <a:r>
-              <a:rPr sz="1200" b="0">
-                <a:solidFill>
-                  <a:srgbClr val="5E6B82"/>
-                </a:solidFill>
-                <a:latin typeface="Aptos"/>
-              </a:rPr>
-              <a:t>What production readiness means</a:t>
-            </a:r>
-          </a:p>
-        </p:txBody>
-      </p:sp>
-      <p:cxnSp>
-        <p:nvCxnSpPr>
-          <p:cNvPr id="31" name="Connector 30"/>
-          <p:cNvCxnSpPr/>
-          <p:nvPr/>
-        </p:nvCxnSpPr>
-        <p:spPr>
-          <a:xfrm>
-            <a:off x="3017520" y="3657600"/>
-            <a:ext cx="502920" cy="0"/>
-          </a:xfrm>
-          <a:prstGeom prst="line">
-            <a:avLst/>
-          </a:prstGeom>
-          <a:ln w="38100">
-            <a:solidFill>
-              <a:srgbClr val="0078D4"/>
-            </a:solidFill>
-          </a:ln>
-        </p:spPr>
-        <p:style>
-          <a:lnRef idx="2">
-            <a:schemeClr val="accent1"/>
-          </a:lnRef>
-          <a:fillRef idx="0">
-            <a:schemeClr val="accent1"/>
-          </a:fillRef>
-          <a:effectRef idx="1">
-            <a:schemeClr val="accent1"/>
-          </a:effectRef>
-          <a:fontRef idx="minor">
-            <a:schemeClr val="tx1"/>
-          </a:fontRef>
-        </p:style>
-      </p:cxnSp>
-      <p:cxnSp>
-        <p:nvCxnSpPr>
-          <p:cNvPr id="32" name="Connector 31"/>
-          <p:cNvCxnSpPr/>
-          <p:nvPr/>
-        </p:nvCxnSpPr>
-        <p:spPr>
-          <a:xfrm>
-            <a:off x="7406640" y="3657600"/>
-            <a:ext cx="502920" cy="0"/>
-          </a:xfrm>
-          <a:prstGeom prst="line">
-            <a:avLst/>
-          </a:prstGeom>
-          <a:ln w="38100">
-            <a:solidFill>
-              <a:srgbClr val="5B5BD6"/>
-            </a:solidFill>
-          </a:ln>
-        </p:spPr>
-        <p:style>
-          <a:lnRef idx="2">
-            <a:schemeClr val="accent1"/>
-          </a:lnRef>
-          <a:fillRef idx="0">
-            <a:schemeClr val="accent1"/>
-          </a:fillRef>
-          <a:effectRef idx="1">
-            <a:schemeClr val="accent1"/>
-          </a:effectRef>
-          <a:fontRef idx="minor">
-            <a:schemeClr val="tx1"/>
-          </a:fontRef>
-        </p:style>
-      </p:cxnSp>
-      <p:sp>
-        <p:nvSpPr>
-          <p:cNvPr id="33" name="TextBox 32"/>
-          <p:cNvSpPr txBox="1"/>
-          <p:nvPr/>
-        </p:nvSpPr>
-        <p:spPr>
-          <a:xfrm>
-            <a:off x="594360" y="6519672"/>
-            <a:ext cx="4114800" cy="164592"/>
-          </a:xfrm>
-          <a:prstGeom prst="rect">
-            <a:avLst/>
-          </a:prstGeom>
-          <a:noFill/>
-        </p:spPr>
-        <p:txBody>
-          <a:bodyPr wrap="square" lIns="54864" rIns="54864" tIns="54864" bIns="54864" anchor="ctr">
-            <a:normAutofit/>
-          </a:bodyPr>
-          <a:lstStyle/>
-          <a:p>
-            <a:pPr algn="l"/>
-            <a:r>
-              <a:rPr sz="800" b="1">
-                <a:solidFill>
-                  <a:srgbClr val="5E6B82"/>
-                </a:solidFill>
-                <a:latin typeface="Aptos"/>
-              </a:rPr>
-              <a:t>EXPERTTWIN · HACKATHON DEMO</a:t>
-            </a:r>
-          </a:p>
-        </p:txBody>
-      </p:sp>
-      <p:sp>
-        <p:nvSpPr>
-          <p:cNvPr id="34" name="TextBox 33"/>
-          <p:cNvSpPr txBox="1"/>
-          <p:nvPr/>
-        </p:nvSpPr>
-        <p:spPr>
-          <a:xfrm>
-            <a:off x="11201400" y="6492240"/>
-            <a:ext cx="411480" cy="201168"/>
-          </a:xfrm>
-          <a:prstGeom prst="rect">
-            <a:avLst/>
-          </a:prstGeom>
-          <a:noFill/>
-        </p:spPr>
-        <p:txBody>
-          <a:bodyPr wrap="square" lIns="54864" rIns="54864" tIns="54864" bIns="54864" anchor="ctr">
-            <a:normAutofit/>
-          </a:bodyPr>
-          <a:lstStyle/>
-          <a:p>
-            <a:pPr algn="r"/>
-            <a:r>
-              <a:rPr sz="900" b="1">
-                <a:solidFill>
-                  <a:srgbClr val="5E6B82"/>
-                </a:solidFill>
-                <a:latin typeface="Aptos"/>
-              </a:rPr>
-              <a:t>4</a:t>
-            </a:r>
-          </a:p>
-        </p:txBody>
-      </p:sp>
+      <p:pic>
+        <p:nvPicPr>
+          <p:cNvPr id="2" name="Picture 1" descr="ExpertTwin-Data-Ingestion-Flow.png"/>
+          <p:cNvPicPr>
+            <a:picLocks noChangeAspect="1"/>
+          </p:cNvPicPr>
+          <p:nvPr/>
+        </p:nvPicPr>
+        <p:blipFill>
+          <a:blip r:embed="rId2"/>
+          <a:stretch>
+            <a:fillRect/>
+          </a:stretch>
+        </p:blipFill>
+        <p:spPr>
+          <a:xfrm>
+            <a:off x="0" y="0"/>
+            <a:ext cx="12191695" cy="6857828"/>
+          </a:xfrm>
+          <a:prstGeom prst="rect">
+            <a:avLst/>
+          </a:prstGeom>
+        </p:spPr>
+      </p:pic>
     </p:spTree>
   </p:cSld>
   <p:clrMapOvr>
@@ -8489,30 +8138,1315 @@
         <p:nvPr/>
       </p:nvGrpSpPr>
       <p:grpSpPr/>
-      <p:pic>
-        <p:nvPicPr>
-          <p:cNvPr id="2" name="Picture 1" descr="ExpertTwin-Azure-Architecture.png"/>
-          <p:cNvPicPr>
-            <a:picLocks noChangeAspect="1"/>
-          </p:cNvPicPr>
-          <p:nvPr/>
-        </p:nvPicPr>
-        <p:blipFill>
-          <a:blip r:embed="rId2"/>
-          <a:stretch>
-            <a:fillRect/>
-          </a:stretch>
-        </p:blipFill>
-        <p:spPr>
-          <a:xfrm>
-            <a:off x="0" y="0"/>
-            <a:ext cx="12191695" cy="6857828"/>
-          </a:xfrm>
-          <a:prstGeom prst="rect">
-            <a:avLst/>
-          </a:prstGeom>
-        </p:spPr>
-      </p:pic>
+      <p:sp>
+        <p:nvSpPr>
+          <p:cNvPr id="2" name="TextBox 1"/>
+          <p:cNvSpPr txBox="1"/>
+          <p:nvPr/>
+        </p:nvSpPr>
+        <p:spPr>
+          <a:xfrm>
+            <a:off x="594360" y="292608"/>
+            <a:ext cx="10972800" cy="320040"/>
+          </a:xfrm>
+          <a:prstGeom prst="rect">
+            <a:avLst/>
+          </a:prstGeom>
+          <a:noFill/>
+        </p:spPr>
+        <p:txBody>
+          <a:bodyPr wrap="square" lIns="54864" rIns="54864" tIns="54864" bIns="54864" anchor="ctr">
+            <a:normAutofit/>
+          </a:bodyPr>
+          <a:lstStyle/>
+          <a:p>
+            <a:pPr algn="l"/>
+            <a:r>
+              <a:rPr sz="1100" b="1">
+                <a:solidFill>
+                  <a:srgbClr val="0078D4"/>
+                </a:solidFill>
+                <a:latin typeface="Aptos"/>
+              </a:rPr>
+              <a:t>EVIDENCE MODEL</a:t>
+            </a:r>
+          </a:p>
+        </p:txBody>
+      </p:sp>
+      <p:sp>
+        <p:nvSpPr>
+          <p:cNvPr id="3" name="TextBox 2"/>
+          <p:cNvSpPr txBox="1"/>
+          <p:nvPr/>
+        </p:nvSpPr>
+        <p:spPr>
+          <a:xfrm>
+            <a:off x="594360" y="621792"/>
+            <a:ext cx="10972800" cy="658368"/>
+          </a:xfrm>
+          <a:prstGeom prst="rect">
+            <a:avLst/>
+          </a:prstGeom>
+          <a:noFill/>
+        </p:spPr>
+        <p:txBody>
+          <a:bodyPr wrap="square" lIns="54864" rIns="54864" tIns="54864" bIns="54864" anchor="ctr">
+            <a:normAutofit/>
+          </a:bodyPr>
+          <a:lstStyle/>
+          <a:p>
+            <a:pPr algn="l"/>
+            <a:r>
+              <a:rPr sz="2800" b="1">
+                <a:solidFill>
+                  <a:srgbClr val="0B1F3A"/>
+                </a:solidFill>
+                <a:latin typeface="Aptos"/>
+              </a:rPr>
+              <a:t>A body of work becomes attributable decision intelligence.</a:t>
+            </a:r>
+          </a:p>
+        </p:txBody>
+      </p:sp>
+      <p:sp>
+        <p:nvSpPr>
+          <p:cNvPr id="4" name="TextBox 3"/>
+          <p:cNvSpPr txBox="1"/>
+          <p:nvPr/>
+        </p:nvSpPr>
+        <p:spPr>
+          <a:xfrm>
+            <a:off x="612648" y="1252728"/>
+            <a:ext cx="10698480" cy="438912"/>
+          </a:xfrm>
+          <a:prstGeom prst="rect">
+            <a:avLst/>
+          </a:prstGeom>
+          <a:noFill/>
+        </p:spPr>
+        <p:txBody>
+          <a:bodyPr wrap="square" lIns="54864" rIns="54864" tIns="54864" bIns="54864" anchor="ctr">
+            <a:normAutofit/>
+          </a:bodyPr>
+          <a:lstStyle/>
+          <a:p>
+            <a:pPr algn="l"/>
+            <a:r>
+              <a:rPr sz="1400" b="0">
+                <a:solidFill>
+                  <a:srgbClr val="5E6B82"/>
+                </a:solidFill>
+                <a:latin typeface="Aptos"/>
+              </a:rPr>
+              <a:t>The system preserves provenance instead of flattening every source into anonymous text chunks.</a:t>
+            </a:r>
+          </a:p>
+        </p:txBody>
+      </p:sp>
+      <p:sp>
+        <p:nvSpPr>
+          <p:cNvPr id="5" name="TextBox 4"/>
+          <p:cNvSpPr txBox="1"/>
+          <p:nvPr/>
+        </p:nvSpPr>
+        <p:spPr>
+          <a:xfrm>
+            <a:off x="640080" y="1874519"/>
+            <a:ext cx="2194560" cy="274320"/>
+          </a:xfrm>
+          <a:prstGeom prst="rect">
+            <a:avLst/>
+          </a:prstGeom>
+          <a:noFill/>
+        </p:spPr>
+        <p:txBody>
+          <a:bodyPr wrap="square" lIns="54864" rIns="54864" tIns="54864" bIns="54864" anchor="ctr">
+            <a:normAutofit/>
+          </a:bodyPr>
+          <a:lstStyle/>
+          <a:p>
+            <a:pPr algn="l"/>
+            <a:r>
+              <a:rPr sz="1100" b="1">
+                <a:solidFill>
+                  <a:srgbClr val="0078D4"/>
+                </a:solidFill>
+                <a:latin typeface="Aptos"/>
+              </a:rPr>
+              <a:t>ENTERPRISE SIGNALS</a:t>
+            </a:r>
+          </a:p>
+        </p:txBody>
+      </p:sp>
+      <p:sp>
+        <p:nvSpPr>
+          <p:cNvPr id="6" name="Rounded Rectangle 5"/>
+          <p:cNvSpPr/>
+          <p:nvPr/>
+        </p:nvSpPr>
+        <p:spPr>
+          <a:xfrm>
+            <a:off x="640080" y="2267712"/>
+            <a:ext cx="2331720" cy="457200"/>
+          </a:xfrm>
+          <a:prstGeom prst="roundRect">
+            <a:avLst/>
+          </a:prstGeom>
+          <a:solidFill>
+            <a:srgbClr val="FFFFFF"/>
+          </a:solidFill>
+          <a:ln w="15240">
+            <a:solidFill>
+              <a:srgbClr val="C8D5E6"/>
+            </a:solidFill>
+          </a:ln>
+        </p:spPr>
+        <p:style>
+          <a:lnRef idx="1">
+            <a:schemeClr val="accent1"/>
+          </a:lnRef>
+          <a:fillRef idx="3">
+            <a:schemeClr val="accent1"/>
+          </a:fillRef>
+          <a:effectRef idx="2">
+            <a:schemeClr val="accent1"/>
+          </a:effectRef>
+          <a:fontRef idx="minor">
+            <a:schemeClr val="lt1"/>
+          </a:fontRef>
+        </p:style>
+        <p:txBody>
+          <a:bodyPr rtlCol="0" anchor="ctr"/>
+          <a:lstStyle/>
+          <a:p>
+            <a:pPr algn="ctr"/>
+          </a:p>
+        </p:txBody>
+      </p:sp>
+      <p:sp>
+        <p:nvSpPr>
+          <p:cNvPr id="7" name="TextBox 6"/>
+          <p:cNvSpPr txBox="1"/>
+          <p:nvPr/>
+        </p:nvSpPr>
+        <p:spPr>
+          <a:xfrm>
+            <a:off x="841248" y="2304288"/>
+            <a:ext cx="1920240" cy="347472"/>
+          </a:xfrm>
+          <a:prstGeom prst="rect">
+            <a:avLst/>
+          </a:prstGeom>
+          <a:noFill/>
+        </p:spPr>
+        <p:txBody>
+          <a:bodyPr wrap="square" lIns="54864" rIns="54864" tIns="54864" bIns="54864" anchor="ctr">
+            <a:normAutofit/>
+          </a:bodyPr>
+          <a:lstStyle/>
+          <a:p>
+            <a:pPr algn="l"/>
+            <a:r>
+              <a:rPr sz="1300" b="1">
+                <a:solidFill>
+                  <a:srgbClr val="17233C"/>
+                </a:solidFill>
+                <a:latin typeface="Aptos"/>
+              </a:rPr>
+              <a:t>Design reviews</a:t>
+            </a:r>
+          </a:p>
+        </p:txBody>
+      </p:sp>
+      <p:sp>
+        <p:nvSpPr>
+          <p:cNvPr id="8" name="Rounded Rectangle 7"/>
+          <p:cNvSpPr/>
+          <p:nvPr/>
+        </p:nvSpPr>
+        <p:spPr>
+          <a:xfrm>
+            <a:off x="640080" y="2880360"/>
+            <a:ext cx="2331720" cy="457200"/>
+          </a:xfrm>
+          <a:prstGeom prst="roundRect">
+            <a:avLst/>
+          </a:prstGeom>
+          <a:solidFill>
+            <a:srgbClr val="FFFFFF"/>
+          </a:solidFill>
+          <a:ln w="15240">
+            <a:solidFill>
+              <a:srgbClr val="C8D5E6"/>
+            </a:solidFill>
+          </a:ln>
+        </p:spPr>
+        <p:style>
+          <a:lnRef idx="1">
+            <a:schemeClr val="accent1"/>
+          </a:lnRef>
+          <a:fillRef idx="3">
+            <a:schemeClr val="accent1"/>
+          </a:fillRef>
+          <a:effectRef idx="2">
+            <a:schemeClr val="accent1"/>
+          </a:effectRef>
+          <a:fontRef idx="minor">
+            <a:schemeClr val="lt1"/>
+          </a:fontRef>
+        </p:style>
+        <p:txBody>
+          <a:bodyPr rtlCol="0" anchor="ctr"/>
+          <a:lstStyle/>
+          <a:p>
+            <a:pPr algn="ctr"/>
+          </a:p>
+        </p:txBody>
+      </p:sp>
+      <p:sp>
+        <p:nvSpPr>
+          <p:cNvPr id="9" name="TextBox 8"/>
+          <p:cNvSpPr txBox="1"/>
+          <p:nvPr/>
+        </p:nvSpPr>
+        <p:spPr>
+          <a:xfrm>
+            <a:off x="841248" y="2916936"/>
+            <a:ext cx="1920240" cy="347472"/>
+          </a:xfrm>
+          <a:prstGeom prst="rect">
+            <a:avLst/>
+          </a:prstGeom>
+          <a:noFill/>
+        </p:spPr>
+        <p:txBody>
+          <a:bodyPr wrap="square" lIns="54864" rIns="54864" tIns="54864" bIns="54864" anchor="ctr">
+            <a:normAutofit/>
+          </a:bodyPr>
+          <a:lstStyle/>
+          <a:p>
+            <a:pPr algn="l"/>
+            <a:r>
+              <a:rPr sz="1300" b="1">
+                <a:solidFill>
+                  <a:srgbClr val="17233C"/>
+                </a:solidFill>
+                <a:latin typeface="Aptos"/>
+              </a:rPr>
+              <a:t>Meeting turns</a:t>
+            </a:r>
+          </a:p>
+        </p:txBody>
+      </p:sp>
+      <p:sp>
+        <p:nvSpPr>
+          <p:cNvPr id="10" name="Rounded Rectangle 9"/>
+          <p:cNvSpPr/>
+          <p:nvPr/>
+        </p:nvSpPr>
+        <p:spPr>
+          <a:xfrm>
+            <a:off x="640080" y="3493008"/>
+            <a:ext cx="2331720" cy="457200"/>
+          </a:xfrm>
+          <a:prstGeom prst="roundRect">
+            <a:avLst/>
+          </a:prstGeom>
+          <a:solidFill>
+            <a:srgbClr val="FFFFFF"/>
+          </a:solidFill>
+          <a:ln w="15240">
+            <a:solidFill>
+              <a:srgbClr val="C8D5E6"/>
+            </a:solidFill>
+          </a:ln>
+        </p:spPr>
+        <p:style>
+          <a:lnRef idx="1">
+            <a:schemeClr val="accent1"/>
+          </a:lnRef>
+          <a:fillRef idx="3">
+            <a:schemeClr val="accent1"/>
+          </a:fillRef>
+          <a:effectRef idx="2">
+            <a:schemeClr val="accent1"/>
+          </a:effectRef>
+          <a:fontRef idx="minor">
+            <a:schemeClr val="lt1"/>
+          </a:fontRef>
+        </p:style>
+        <p:txBody>
+          <a:bodyPr rtlCol="0" anchor="ctr"/>
+          <a:lstStyle/>
+          <a:p>
+            <a:pPr algn="ctr"/>
+          </a:p>
+        </p:txBody>
+      </p:sp>
+      <p:sp>
+        <p:nvSpPr>
+          <p:cNvPr id="11" name="TextBox 10"/>
+          <p:cNvSpPr txBox="1"/>
+          <p:nvPr/>
+        </p:nvSpPr>
+        <p:spPr>
+          <a:xfrm>
+            <a:off x="841248" y="3529584"/>
+            <a:ext cx="1920240" cy="347472"/>
+          </a:xfrm>
+          <a:prstGeom prst="rect">
+            <a:avLst/>
+          </a:prstGeom>
+          <a:noFill/>
+        </p:spPr>
+        <p:txBody>
+          <a:bodyPr wrap="square" lIns="54864" rIns="54864" tIns="54864" bIns="54864" anchor="ctr">
+            <a:normAutofit/>
+          </a:bodyPr>
+          <a:lstStyle/>
+          <a:p>
+            <a:pPr algn="l"/>
+            <a:r>
+              <a:rPr sz="1300" b="1">
+                <a:solidFill>
+                  <a:srgbClr val="17233C"/>
+                </a:solidFill>
+                <a:latin typeface="Aptos"/>
+              </a:rPr>
+              <a:t>Engineering chat</a:t>
+            </a:r>
+          </a:p>
+        </p:txBody>
+      </p:sp>
+      <p:sp>
+        <p:nvSpPr>
+          <p:cNvPr id="12" name="Rounded Rectangle 11"/>
+          <p:cNvSpPr/>
+          <p:nvPr/>
+        </p:nvSpPr>
+        <p:spPr>
+          <a:xfrm>
+            <a:off x="640080" y="4105656"/>
+            <a:ext cx="2331720" cy="457200"/>
+          </a:xfrm>
+          <a:prstGeom prst="roundRect">
+            <a:avLst/>
+          </a:prstGeom>
+          <a:solidFill>
+            <a:srgbClr val="FFFFFF"/>
+          </a:solidFill>
+          <a:ln w="15240">
+            <a:solidFill>
+              <a:srgbClr val="C8D5E6"/>
+            </a:solidFill>
+          </a:ln>
+        </p:spPr>
+        <p:style>
+          <a:lnRef idx="1">
+            <a:schemeClr val="accent1"/>
+          </a:lnRef>
+          <a:fillRef idx="3">
+            <a:schemeClr val="accent1"/>
+          </a:fillRef>
+          <a:effectRef idx="2">
+            <a:schemeClr val="accent1"/>
+          </a:effectRef>
+          <a:fontRef idx="minor">
+            <a:schemeClr val="lt1"/>
+          </a:fontRef>
+        </p:style>
+        <p:txBody>
+          <a:bodyPr rtlCol="0" anchor="ctr"/>
+          <a:lstStyle/>
+          <a:p>
+            <a:pPr algn="ctr"/>
+          </a:p>
+        </p:txBody>
+      </p:sp>
+      <p:sp>
+        <p:nvSpPr>
+          <p:cNvPr id="13" name="TextBox 12"/>
+          <p:cNvSpPr txBox="1"/>
+          <p:nvPr/>
+        </p:nvSpPr>
+        <p:spPr>
+          <a:xfrm>
+            <a:off x="841248" y="4142232"/>
+            <a:ext cx="1920240" cy="347472"/>
+          </a:xfrm>
+          <a:prstGeom prst="rect">
+            <a:avLst/>
+          </a:prstGeom>
+          <a:noFill/>
+        </p:spPr>
+        <p:txBody>
+          <a:bodyPr wrap="square" lIns="54864" rIns="54864" tIns="54864" bIns="54864" anchor="ctr">
+            <a:normAutofit/>
+          </a:bodyPr>
+          <a:lstStyle/>
+          <a:p>
+            <a:pPr algn="l"/>
+            <a:r>
+              <a:rPr sz="1300" b="1">
+                <a:solidFill>
+                  <a:srgbClr val="17233C"/>
+                </a:solidFill>
+                <a:latin typeface="Aptos"/>
+              </a:rPr>
+              <a:t>Incidents</a:t>
+            </a:r>
+          </a:p>
+        </p:txBody>
+      </p:sp>
+      <p:sp>
+        <p:nvSpPr>
+          <p:cNvPr id="14" name="Rounded Rectangle 13"/>
+          <p:cNvSpPr/>
+          <p:nvPr/>
+        </p:nvSpPr>
+        <p:spPr>
+          <a:xfrm>
+            <a:off x="640080" y="4718304"/>
+            <a:ext cx="2331720" cy="457200"/>
+          </a:xfrm>
+          <a:prstGeom prst="roundRect">
+            <a:avLst/>
+          </a:prstGeom>
+          <a:solidFill>
+            <a:srgbClr val="FFFFFF"/>
+          </a:solidFill>
+          <a:ln w="15240">
+            <a:solidFill>
+              <a:srgbClr val="C8D5E6"/>
+            </a:solidFill>
+          </a:ln>
+        </p:spPr>
+        <p:style>
+          <a:lnRef idx="1">
+            <a:schemeClr val="accent1"/>
+          </a:lnRef>
+          <a:fillRef idx="3">
+            <a:schemeClr val="accent1"/>
+          </a:fillRef>
+          <a:effectRef idx="2">
+            <a:schemeClr val="accent1"/>
+          </a:effectRef>
+          <a:fontRef idx="minor">
+            <a:schemeClr val="lt1"/>
+          </a:fontRef>
+        </p:style>
+        <p:txBody>
+          <a:bodyPr rtlCol="0" anchor="ctr"/>
+          <a:lstStyle/>
+          <a:p>
+            <a:pPr algn="ctr"/>
+          </a:p>
+        </p:txBody>
+      </p:sp>
+      <p:sp>
+        <p:nvSpPr>
+          <p:cNvPr id="15" name="TextBox 14"/>
+          <p:cNvSpPr txBox="1"/>
+          <p:nvPr/>
+        </p:nvSpPr>
+        <p:spPr>
+          <a:xfrm>
+            <a:off x="841248" y="4754880"/>
+            <a:ext cx="1920240" cy="347472"/>
+          </a:xfrm>
+          <a:prstGeom prst="rect">
+            <a:avLst/>
+          </a:prstGeom>
+          <a:noFill/>
+        </p:spPr>
+        <p:txBody>
+          <a:bodyPr wrap="square" lIns="54864" rIns="54864" tIns="54864" bIns="54864" anchor="ctr">
+            <a:normAutofit/>
+          </a:bodyPr>
+          <a:lstStyle/>
+          <a:p>
+            <a:pPr algn="l"/>
+            <a:r>
+              <a:rPr sz="1300" b="1">
+                <a:solidFill>
+                  <a:srgbClr val="17233C"/>
+                </a:solidFill>
+                <a:latin typeface="Aptos"/>
+              </a:rPr>
+              <a:t>ADRs + outcomes</a:t>
+            </a:r>
+          </a:p>
+        </p:txBody>
+      </p:sp>
+      <p:sp>
+        <p:nvSpPr>
+          <p:cNvPr id="16" name="TextBox 15"/>
+          <p:cNvSpPr txBox="1"/>
+          <p:nvPr/>
+        </p:nvSpPr>
+        <p:spPr>
+          <a:xfrm>
+            <a:off x="3657600" y="1874519"/>
+            <a:ext cx="2926080" cy="274320"/>
+          </a:xfrm>
+          <a:prstGeom prst="rect">
+            <a:avLst/>
+          </a:prstGeom>
+          <a:noFill/>
+        </p:spPr>
+        <p:txBody>
+          <a:bodyPr wrap="square" lIns="54864" rIns="54864" tIns="54864" bIns="54864" anchor="ctr">
+            <a:normAutofit/>
+          </a:bodyPr>
+          <a:lstStyle/>
+          <a:p>
+            <a:pPr algn="l"/>
+            <a:r>
+              <a:rPr sz="1100" b="1">
+                <a:solidFill>
+                  <a:srgbClr val="0F9D8B"/>
+                </a:solidFill>
+                <a:latin typeface="Aptos"/>
+              </a:rPr>
+              <a:t>STRUCTURED DECISION RECORD</a:t>
+            </a:r>
+          </a:p>
+        </p:txBody>
+      </p:sp>
+      <p:sp>
+        <p:nvSpPr>
+          <p:cNvPr id="17" name="Rounded Rectangle 16"/>
+          <p:cNvSpPr/>
+          <p:nvPr/>
+        </p:nvSpPr>
+        <p:spPr>
+          <a:xfrm>
+            <a:off x="3611880" y="2267712"/>
+            <a:ext cx="3749039" cy="2944368"/>
+          </a:xfrm>
+          <a:prstGeom prst="roundRect">
+            <a:avLst/>
+          </a:prstGeom>
+          <a:solidFill>
+            <a:srgbClr val="FFFFFF"/>
+          </a:solidFill>
+          <a:ln w="15240">
+            <a:solidFill>
+              <a:srgbClr val="0F9D8B"/>
+            </a:solidFill>
+          </a:ln>
+        </p:spPr>
+        <p:style>
+          <a:lnRef idx="1">
+            <a:schemeClr val="accent1"/>
+          </a:lnRef>
+          <a:fillRef idx="3">
+            <a:schemeClr val="accent1"/>
+          </a:fillRef>
+          <a:effectRef idx="2">
+            <a:schemeClr val="accent1"/>
+          </a:effectRef>
+          <a:fontRef idx="minor">
+            <a:schemeClr val="lt1"/>
+          </a:fontRef>
+        </p:style>
+        <p:txBody>
+          <a:bodyPr rtlCol="0" anchor="ctr"/>
+          <a:lstStyle/>
+          <a:p>
+            <a:pPr algn="ctr"/>
+          </a:p>
+        </p:txBody>
+      </p:sp>
+      <p:sp>
+        <p:nvSpPr>
+          <p:cNvPr id="18" name="TextBox 17"/>
+          <p:cNvSpPr txBox="1"/>
+          <p:nvPr/>
+        </p:nvSpPr>
+        <p:spPr>
+          <a:xfrm>
+            <a:off x="3913632" y="2487168"/>
+            <a:ext cx="3154680" cy="2423160"/>
+          </a:xfrm>
+          <a:prstGeom prst="rect">
+            <a:avLst/>
+          </a:prstGeom>
+          <a:noFill/>
+        </p:spPr>
+        <p:txBody>
+          <a:bodyPr wrap="square">
+            <a:normAutofit/>
+          </a:bodyPr>
+          <a:lstStyle/>
+          <a:p>
+            <a:pPr>
+              <a:spcAft>
+                <a:spcPts val="1000"/>
+              </a:spcAft>
+              <a:defRPr sz="1500">
+                <a:solidFill>
+                  <a:srgbClr val="17233C"/>
+                </a:solidFill>
+                <a:latin typeface="Aptos"/>
+              </a:defRPr>
+            </a:pPr>
+            <a:r>
+              <a:t>•  Expert + role + timestamp</a:t>
+            </a:r>
+          </a:p>
+          <a:p>
+            <a:pPr>
+              <a:spcAft>
+                <a:spcPts val="1000"/>
+              </a:spcAft>
+              <a:defRPr sz="1500">
+                <a:solidFill>
+                  <a:srgbClr val="17233C"/>
+                </a:solidFill>
+                <a:latin typeface="Aptos"/>
+              </a:defRPr>
+            </a:pPr>
+            <a:r>
+              <a:t>•  Choice and alternatives</a:t>
+            </a:r>
+          </a:p>
+          <a:p>
+            <a:pPr>
+              <a:spcAft>
+                <a:spcPts val="1000"/>
+              </a:spcAft>
+              <a:defRPr sz="1500">
+                <a:solidFill>
+                  <a:srgbClr val="17233C"/>
+                </a:solidFill>
+                <a:latin typeface="Aptos"/>
+              </a:defRPr>
+            </a:pPr>
+            <a:r>
+              <a:t>•  Rationale and constraints</a:t>
+            </a:r>
+          </a:p>
+          <a:p>
+            <a:pPr>
+              <a:spcAft>
+                <a:spcPts val="1000"/>
+              </a:spcAft>
+              <a:defRPr sz="1500">
+                <a:solidFill>
+                  <a:srgbClr val="17233C"/>
+                </a:solidFill>
+                <a:latin typeface="Aptos"/>
+              </a:defRPr>
+            </a:pPr>
+            <a:r>
+              <a:t>•  Risks and observed outcome</a:t>
+            </a:r>
+          </a:p>
+          <a:p>
+            <a:pPr>
+              <a:spcAft>
+                <a:spcPts val="1000"/>
+              </a:spcAft>
+              <a:defRPr sz="1500">
+                <a:solidFill>
+                  <a:srgbClr val="17233C"/>
+                </a:solidFill>
+                <a:latin typeface="Aptos"/>
+              </a:defRPr>
+            </a:pPr>
+            <a:r>
+              <a:t>•  Source, segment, thread, confidence</a:t>
+            </a:r>
+          </a:p>
+          <a:p>
+            <a:pPr>
+              <a:spcAft>
+                <a:spcPts val="1000"/>
+              </a:spcAft>
+              <a:defRPr sz="1500">
+                <a:solidFill>
+                  <a:srgbClr val="17233C"/>
+                </a:solidFill>
+                <a:latin typeface="Aptos"/>
+              </a:defRPr>
+            </a:pPr>
+            <a:r>
+              <a:t>•  Simulation and attribution status</a:t>
+            </a:r>
+          </a:p>
+        </p:txBody>
+      </p:sp>
+      <p:sp>
+        <p:nvSpPr>
+          <p:cNvPr id="19" name="TextBox 18"/>
+          <p:cNvSpPr txBox="1"/>
+          <p:nvPr/>
+        </p:nvSpPr>
+        <p:spPr>
+          <a:xfrm>
+            <a:off x="8028431" y="1874519"/>
+            <a:ext cx="2743200" cy="274320"/>
+          </a:xfrm>
+          <a:prstGeom prst="rect">
+            <a:avLst/>
+          </a:prstGeom>
+          <a:noFill/>
+        </p:spPr>
+        <p:txBody>
+          <a:bodyPr wrap="square" lIns="54864" rIns="54864" tIns="54864" bIns="54864" anchor="ctr">
+            <a:normAutofit/>
+          </a:bodyPr>
+          <a:lstStyle/>
+          <a:p>
+            <a:pPr algn="l"/>
+            <a:r>
+              <a:rPr sz="1100" b="1">
+                <a:solidFill>
+                  <a:srgbClr val="5B5BD6"/>
+                </a:solidFill>
+                <a:latin typeface="Aptos"/>
+              </a:rPr>
+              <a:t>DECISION FINGERPRINT</a:t>
+            </a:r>
+          </a:p>
+        </p:txBody>
+      </p:sp>
+      <p:sp>
+        <p:nvSpPr>
+          <p:cNvPr id="20" name="Rounded Rectangle 19"/>
+          <p:cNvSpPr/>
+          <p:nvPr/>
+        </p:nvSpPr>
+        <p:spPr>
+          <a:xfrm>
+            <a:off x="7973568" y="2267712"/>
+            <a:ext cx="3566160" cy="2944368"/>
+          </a:xfrm>
+          <a:prstGeom prst="roundRect">
+            <a:avLst/>
+          </a:prstGeom>
+          <a:solidFill>
+            <a:srgbClr val="F5F1FF"/>
+          </a:solidFill>
+          <a:ln w="15240">
+            <a:solidFill>
+              <a:srgbClr val="5B5BD6"/>
+            </a:solidFill>
+          </a:ln>
+        </p:spPr>
+        <p:style>
+          <a:lnRef idx="1">
+            <a:schemeClr val="accent1"/>
+          </a:lnRef>
+          <a:fillRef idx="3">
+            <a:schemeClr val="accent1"/>
+          </a:fillRef>
+          <a:effectRef idx="2">
+            <a:schemeClr val="accent1"/>
+          </a:effectRef>
+          <a:fontRef idx="minor">
+            <a:schemeClr val="lt1"/>
+          </a:fontRef>
+        </p:style>
+        <p:txBody>
+          <a:bodyPr rtlCol="0" anchor="ctr"/>
+          <a:lstStyle/>
+          <a:p>
+            <a:pPr algn="ctr"/>
+          </a:p>
+        </p:txBody>
+      </p:sp>
+      <p:sp>
+        <p:nvSpPr>
+          <p:cNvPr id="21" name="TextBox 20"/>
+          <p:cNvSpPr txBox="1"/>
+          <p:nvPr/>
+        </p:nvSpPr>
+        <p:spPr>
+          <a:xfrm>
+            <a:off x="8275320" y="2468880"/>
+            <a:ext cx="1508760" cy="320040"/>
+          </a:xfrm>
+          <a:prstGeom prst="rect">
+            <a:avLst/>
+          </a:prstGeom>
+          <a:noFill/>
+        </p:spPr>
+        <p:txBody>
+          <a:bodyPr wrap="square" lIns="54864" rIns="54864" tIns="54864" bIns="54864" anchor="ctr">
+            <a:normAutofit/>
+          </a:bodyPr>
+          <a:lstStyle/>
+          <a:p>
+            <a:pPr algn="l"/>
+            <a:r>
+              <a:rPr sz="1400" b="1">
+                <a:solidFill>
+                  <a:srgbClr val="0B1F3A"/>
+                </a:solidFill>
+                <a:latin typeface="Aptos"/>
+              </a:rPr>
+              <a:t>Trade-off style</a:t>
+            </a:r>
+          </a:p>
+        </p:txBody>
+      </p:sp>
+      <p:sp>
+        <p:nvSpPr>
+          <p:cNvPr id="22" name="TextBox 21"/>
+          <p:cNvSpPr txBox="1"/>
+          <p:nvPr/>
+        </p:nvSpPr>
+        <p:spPr>
+          <a:xfrm>
+            <a:off x="9710928" y="2468880"/>
+            <a:ext cx="1481328" cy="320040"/>
+          </a:xfrm>
+          <a:prstGeom prst="rect">
+            <a:avLst/>
+          </a:prstGeom>
+          <a:noFill/>
+        </p:spPr>
+        <p:txBody>
+          <a:bodyPr wrap="square" lIns="54864" rIns="54864" tIns="54864" bIns="54864" anchor="ctr">
+            <a:normAutofit/>
+          </a:bodyPr>
+          <a:lstStyle/>
+          <a:p>
+            <a:pPr algn="l"/>
+            <a:r>
+              <a:rPr sz="1200" b="0">
+                <a:solidFill>
+                  <a:srgbClr val="5E6B82"/>
+                </a:solidFill>
+                <a:latin typeface="Aptos"/>
+              </a:rPr>
+              <a:t>What gets optimized</a:t>
+            </a:r>
+          </a:p>
+        </p:txBody>
+      </p:sp>
+      <p:sp>
+        <p:nvSpPr>
+          <p:cNvPr id="23" name="TextBox 22"/>
+          <p:cNvSpPr txBox="1"/>
+          <p:nvPr/>
+        </p:nvSpPr>
+        <p:spPr>
+          <a:xfrm>
+            <a:off x="8275320" y="2953512"/>
+            <a:ext cx="1508760" cy="320040"/>
+          </a:xfrm>
+          <a:prstGeom prst="rect">
+            <a:avLst/>
+          </a:prstGeom>
+          <a:noFill/>
+        </p:spPr>
+        <p:txBody>
+          <a:bodyPr wrap="square" lIns="54864" rIns="54864" tIns="54864" bIns="54864" anchor="ctr">
+            <a:normAutofit/>
+          </a:bodyPr>
+          <a:lstStyle/>
+          <a:p>
+            <a:pPr algn="l"/>
+            <a:r>
+              <a:rPr sz="1400" b="1">
+                <a:solidFill>
+                  <a:srgbClr val="0B1F3A"/>
+                </a:solidFill>
+                <a:latin typeface="Aptos"/>
+              </a:rPr>
+              <a:t>Risk posture</a:t>
+            </a:r>
+          </a:p>
+        </p:txBody>
+      </p:sp>
+      <p:sp>
+        <p:nvSpPr>
+          <p:cNvPr id="24" name="TextBox 23"/>
+          <p:cNvSpPr txBox="1"/>
+          <p:nvPr/>
+        </p:nvSpPr>
+        <p:spPr>
+          <a:xfrm>
+            <a:off x="9710928" y="2953512"/>
+            <a:ext cx="1481328" cy="320040"/>
+          </a:xfrm>
+          <a:prstGeom prst="rect">
+            <a:avLst/>
+          </a:prstGeom>
+          <a:noFill/>
+        </p:spPr>
+        <p:txBody>
+          <a:bodyPr wrap="square" lIns="54864" rIns="54864" tIns="54864" bIns="54864" anchor="ctr">
+            <a:normAutofit/>
+          </a:bodyPr>
+          <a:lstStyle/>
+          <a:p>
+            <a:pPr algn="l"/>
+            <a:r>
+              <a:rPr sz="1200" b="0">
+                <a:solidFill>
+                  <a:srgbClr val="5E6B82"/>
+                </a:solidFill>
+                <a:latin typeface="Aptos"/>
+              </a:rPr>
+              <a:t>What must be protected</a:t>
+            </a:r>
+          </a:p>
+        </p:txBody>
+      </p:sp>
+      <p:sp>
+        <p:nvSpPr>
+          <p:cNvPr id="25" name="TextBox 24"/>
+          <p:cNvSpPr txBox="1"/>
+          <p:nvPr/>
+        </p:nvSpPr>
+        <p:spPr>
+          <a:xfrm>
+            <a:off x="8275320" y="3438144"/>
+            <a:ext cx="1508760" cy="320040"/>
+          </a:xfrm>
+          <a:prstGeom prst="rect">
+            <a:avLst/>
+          </a:prstGeom>
+          <a:noFill/>
+        </p:spPr>
+        <p:txBody>
+          <a:bodyPr wrap="square" lIns="54864" rIns="54864" tIns="54864" bIns="54864" anchor="ctr">
+            <a:normAutofit/>
+          </a:bodyPr>
+          <a:lstStyle/>
+          <a:p>
+            <a:pPr algn="l"/>
+            <a:r>
+              <a:rPr sz="1400" b="1">
+                <a:solidFill>
+                  <a:srgbClr val="0B1F3A"/>
+                </a:solidFill>
+                <a:latin typeface="Aptos"/>
+              </a:rPr>
+              <a:t>Selection criteria</a:t>
+            </a:r>
+          </a:p>
+        </p:txBody>
+      </p:sp>
+      <p:sp>
+        <p:nvSpPr>
+          <p:cNvPr id="26" name="TextBox 25"/>
+          <p:cNvSpPr txBox="1"/>
+          <p:nvPr/>
+        </p:nvSpPr>
+        <p:spPr>
+          <a:xfrm>
+            <a:off x="9710928" y="3438144"/>
+            <a:ext cx="1481328" cy="320040"/>
+          </a:xfrm>
+          <a:prstGeom prst="rect">
+            <a:avLst/>
+          </a:prstGeom>
+          <a:noFill/>
+        </p:spPr>
+        <p:txBody>
+          <a:bodyPr wrap="square" lIns="54864" rIns="54864" tIns="54864" bIns="54864" anchor="ctr">
+            <a:normAutofit/>
+          </a:bodyPr>
+          <a:lstStyle/>
+          <a:p>
+            <a:pPr algn="l"/>
+            <a:r>
+              <a:rPr sz="1200" b="0">
+                <a:solidFill>
+                  <a:srgbClr val="5E6B82"/>
+                </a:solidFill>
+                <a:latin typeface="Aptos"/>
+              </a:rPr>
+              <a:t>How technologies are compared</a:t>
+            </a:r>
+          </a:p>
+        </p:txBody>
+      </p:sp>
+      <p:sp>
+        <p:nvSpPr>
+          <p:cNvPr id="27" name="TextBox 26"/>
+          <p:cNvSpPr txBox="1"/>
+          <p:nvPr/>
+        </p:nvSpPr>
+        <p:spPr>
+          <a:xfrm>
+            <a:off x="8275320" y="3922776"/>
+            <a:ext cx="1508760" cy="320040"/>
+          </a:xfrm>
+          <a:prstGeom prst="rect">
+            <a:avLst/>
+          </a:prstGeom>
+          <a:noFill/>
+        </p:spPr>
+        <p:txBody>
+          <a:bodyPr wrap="square" lIns="54864" rIns="54864" tIns="54864" bIns="54864" anchor="ctr">
+            <a:normAutofit/>
+          </a:bodyPr>
+          <a:lstStyle/>
+          <a:p>
+            <a:pPr algn="l"/>
+            <a:r>
+              <a:rPr sz="1400" b="1">
+                <a:solidFill>
+                  <a:srgbClr val="0B1F3A"/>
+                </a:solidFill>
+                <a:latin typeface="Aptos"/>
+              </a:rPr>
+              <a:t>Recovery strategy</a:t>
+            </a:r>
+          </a:p>
+        </p:txBody>
+      </p:sp>
+      <p:sp>
+        <p:nvSpPr>
+          <p:cNvPr id="28" name="TextBox 27"/>
+          <p:cNvSpPr txBox="1"/>
+          <p:nvPr/>
+        </p:nvSpPr>
+        <p:spPr>
+          <a:xfrm>
+            <a:off x="9710928" y="3922776"/>
+            <a:ext cx="1481328" cy="320040"/>
+          </a:xfrm>
+          <a:prstGeom prst="rect">
+            <a:avLst/>
+          </a:prstGeom>
+          <a:noFill/>
+        </p:spPr>
+        <p:txBody>
+          <a:bodyPr wrap="square" lIns="54864" rIns="54864" tIns="54864" bIns="54864" anchor="ctr">
+            <a:normAutofit/>
+          </a:bodyPr>
+          <a:lstStyle/>
+          <a:p>
+            <a:pPr algn="l"/>
+            <a:r>
+              <a:rPr sz="1200" b="0">
+                <a:solidFill>
+                  <a:srgbClr val="5E6B82"/>
+                </a:solidFill>
+                <a:latin typeface="Aptos"/>
+              </a:rPr>
+              <a:t>How failure is handled</a:t>
+            </a:r>
+          </a:p>
+        </p:txBody>
+      </p:sp>
+      <p:sp>
+        <p:nvSpPr>
+          <p:cNvPr id="29" name="TextBox 28"/>
+          <p:cNvSpPr txBox="1"/>
+          <p:nvPr/>
+        </p:nvSpPr>
+        <p:spPr>
+          <a:xfrm>
+            <a:off x="8275320" y="4407408"/>
+            <a:ext cx="1508760" cy="320040"/>
+          </a:xfrm>
+          <a:prstGeom prst="rect">
+            <a:avLst/>
+          </a:prstGeom>
+          <a:noFill/>
+        </p:spPr>
+        <p:txBody>
+          <a:bodyPr wrap="square" lIns="54864" rIns="54864" tIns="54864" bIns="54864" anchor="ctr">
+            <a:normAutofit/>
+          </a:bodyPr>
+          <a:lstStyle/>
+          <a:p>
+            <a:pPr algn="l"/>
+            <a:r>
+              <a:rPr sz="1400" b="1">
+                <a:solidFill>
+                  <a:srgbClr val="0B1F3A"/>
+                </a:solidFill>
+                <a:latin typeface="Aptos"/>
+              </a:rPr>
+              <a:t>Operating principles</a:t>
+            </a:r>
+          </a:p>
+        </p:txBody>
+      </p:sp>
+      <p:sp>
+        <p:nvSpPr>
+          <p:cNvPr id="30" name="TextBox 29"/>
+          <p:cNvSpPr txBox="1"/>
+          <p:nvPr/>
+        </p:nvSpPr>
+        <p:spPr>
+          <a:xfrm>
+            <a:off x="9710928" y="4407408"/>
+            <a:ext cx="1481328" cy="320040"/>
+          </a:xfrm>
+          <a:prstGeom prst="rect">
+            <a:avLst/>
+          </a:prstGeom>
+          <a:noFill/>
+        </p:spPr>
+        <p:txBody>
+          <a:bodyPr wrap="square" lIns="54864" rIns="54864" tIns="54864" bIns="54864" anchor="ctr">
+            <a:normAutofit/>
+          </a:bodyPr>
+          <a:lstStyle/>
+          <a:p>
+            <a:pPr algn="l"/>
+            <a:r>
+              <a:rPr sz="1200" b="0">
+                <a:solidFill>
+                  <a:srgbClr val="5E6B82"/>
+                </a:solidFill>
+                <a:latin typeface="Aptos"/>
+              </a:rPr>
+              <a:t>What production readiness means</a:t>
+            </a:r>
+          </a:p>
+        </p:txBody>
+      </p:sp>
+      <p:cxnSp>
+        <p:nvCxnSpPr>
+          <p:cNvPr id="31" name="Connector 30"/>
+          <p:cNvCxnSpPr/>
+          <p:nvPr/>
+        </p:nvCxnSpPr>
+        <p:spPr>
+          <a:xfrm>
+            <a:off x="3017520" y="3657600"/>
+            <a:ext cx="502920" cy="0"/>
+          </a:xfrm>
+          <a:prstGeom prst="line">
+            <a:avLst/>
+          </a:prstGeom>
+          <a:ln w="38100">
+            <a:solidFill>
+              <a:srgbClr val="0078D4"/>
+            </a:solidFill>
+          </a:ln>
+        </p:spPr>
+        <p:style>
+          <a:lnRef idx="2">
+            <a:schemeClr val="accent1"/>
+          </a:lnRef>
+          <a:fillRef idx="0">
+            <a:schemeClr val="accent1"/>
+          </a:fillRef>
+          <a:effectRef idx="1">
+            <a:schemeClr val="accent1"/>
+          </a:effectRef>
+          <a:fontRef idx="minor">
+            <a:schemeClr val="tx1"/>
+          </a:fontRef>
+        </p:style>
+      </p:cxnSp>
+      <p:cxnSp>
+        <p:nvCxnSpPr>
+          <p:cNvPr id="32" name="Connector 31"/>
+          <p:cNvCxnSpPr/>
+          <p:nvPr/>
+        </p:nvCxnSpPr>
+        <p:spPr>
+          <a:xfrm>
+            <a:off x="7406640" y="3657600"/>
+            <a:ext cx="502920" cy="0"/>
+          </a:xfrm>
+          <a:prstGeom prst="line">
+            <a:avLst/>
+          </a:prstGeom>
+          <a:ln w="38100">
+            <a:solidFill>
+              <a:srgbClr val="5B5BD6"/>
+            </a:solidFill>
+          </a:ln>
+        </p:spPr>
+        <p:style>
+          <a:lnRef idx="2">
+            <a:schemeClr val="accent1"/>
+          </a:lnRef>
+          <a:fillRef idx="0">
+            <a:schemeClr val="accent1"/>
+          </a:fillRef>
+          <a:effectRef idx="1">
+            <a:schemeClr val="accent1"/>
+          </a:effectRef>
+          <a:fontRef idx="minor">
+            <a:schemeClr val="tx1"/>
+          </a:fontRef>
+        </p:style>
+      </p:cxnSp>
+      <p:sp>
+        <p:nvSpPr>
+          <p:cNvPr id="33" name="TextBox 32"/>
+          <p:cNvSpPr txBox="1"/>
+          <p:nvPr/>
+        </p:nvSpPr>
+        <p:spPr>
+          <a:xfrm>
+            <a:off x="594360" y="6519672"/>
+            <a:ext cx="4114800" cy="164592"/>
+          </a:xfrm>
+          <a:prstGeom prst="rect">
+            <a:avLst/>
+          </a:prstGeom>
+          <a:noFill/>
+        </p:spPr>
+        <p:txBody>
+          <a:bodyPr wrap="square" lIns="54864" rIns="54864" tIns="54864" bIns="54864" anchor="ctr">
+            <a:normAutofit/>
+          </a:bodyPr>
+          <a:lstStyle/>
+          <a:p>
+            <a:pPr algn="l"/>
+            <a:r>
+              <a:rPr sz="800" b="1">
+                <a:solidFill>
+                  <a:srgbClr val="5E6B82"/>
+                </a:solidFill>
+                <a:latin typeface="Aptos"/>
+              </a:rPr>
+              <a:t>EXPERTTWIN · HACKATHON DEMO</a:t>
+            </a:r>
+          </a:p>
+        </p:txBody>
+      </p:sp>
+      <p:sp>
+        <p:nvSpPr>
+          <p:cNvPr id="34" name="TextBox 33"/>
+          <p:cNvSpPr txBox="1"/>
+          <p:nvPr/>
+        </p:nvSpPr>
+        <p:spPr>
+          <a:xfrm>
+            <a:off x="11201400" y="6492240"/>
+            <a:ext cx="411480" cy="201168"/>
+          </a:xfrm>
+          <a:prstGeom prst="rect">
+            <a:avLst/>
+          </a:prstGeom>
+          <a:noFill/>
+        </p:spPr>
+        <p:txBody>
+          <a:bodyPr wrap="square" lIns="54864" rIns="54864" tIns="54864" bIns="54864" anchor="ctr">
+            <a:normAutofit/>
+          </a:bodyPr>
+          <a:lstStyle/>
+          <a:p>
+            <a:pPr algn="r"/>
+            <a:r>
+              <a:rPr sz="900" b="1">
+                <a:solidFill>
+                  <a:srgbClr val="5E6B82"/>
+                </a:solidFill>
+                <a:latin typeface="Aptos"/>
+              </a:rPr>
+              <a:t>5</a:t>
+            </a:r>
+          </a:p>
+        </p:txBody>
+      </p:sp>
     </p:spTree>
   </p:cSld>
   <p:clrMapOvr>
@@ -8539,766 +9473,30 @@
         <p:nvPr/>
       </p:nvGrpSpPr>
       <p:grpSpPr/>
-      <p:sp>
-        <p:nvSpPr>
-          <p:cNvPr id="2" name="TextBox 1"/>
-          <p:cNvSpPr txBox="1"/>
-          <p:nvPr/>
-        </p:nvSpPr>
-        <p:spPr>
-          <a:xfrm>
-            <a:off x="594360" y="292608"/>
-            <a:ext cx="10972800" cy="320040"/>
-          </a:xfrm>
-          <a:prstGeom prst="rect">
-            <a:avLst/>
-          </a:prstGeom>
-          <a:noFill/>
-        </p:spPr>
-        <p:txBody>
-          <a:bodyPr wrap="square" lIns="54864" rIns="54864" tIns="54864" bIns="54864" anchor="ctr">
-            <a:normAutofit/>
-          </a:bodyPr>
-          <a:lstStyle/>
-          <a:p>
-            <a:pPr algn="l"/>
-            <a:r>
-              <a:rPr sz="1100" b="1">
-                <a:solidFill>
-                  <a:srgbClr val="0078D4"/>
-                </a:solidFill>
-                <a:latin typeface="Aptos"/>
-              </a:rPr>
-              <a:t>EXPERIENCE 1</a:t>
-            </a:r>
-          </a:p>
-        </p:txBody>
-      </p:sp>
-      <p:sp>
-        <p:nvSpPr>
-          <p:cNvPr id="3" name="TextBox 2"/>
-          <p:cNvSpPr txBox="1"/>
-          <p:nvPr/>
-        </p:nvSpPr>
-        <p:spPr>
-          <a:xfrm>
-            <a:off x="594360" y="621792"/>
-            <a:ext cx="10972800" cy="658368"/>
-          </a:xfrm>
-          <a:prstGeom prst="rect">
-            <a:avLst/>
-          </a:prstGeom>
-          <a:noFill/>
-        </p:spPr>
-        <p:txBody>
-          <a:bodyPr wrap="square" lIns="54864" rIns="54864" tIns="54864" bIns="54864" anchor="ctr">
-            <a:normAutofit/>
-          </a:bodyPr>
-          <a:lstStyle/>
-          <a:p>
-            <a:pPr algn="l"/>
-            <a:r>
-              <a:rPr sz="2800" b="1">
-                <a:solidFill>
-                  <a:srgbClr val="0B1F3A"/>
-                </a:solidFill>
-                <a:latin typeface="Aptos"/>
-              </a:rPr>
-              <a:t>Ask one expert’s AI Clone.</a:t>
-            </a:r>
-          </a:p>
-        </p:txBody>
-      </p:sp>
-      <p:sp>
-        <p:nvSpPr>
-          <p:cNvPr id="4" name="TextBox 3"/>
-          <p:cNvSpPr txBox="1"/>
-          <p:nvPr/>
-        </p:nvSpPr>
-        <p:spPr>
-          <a:xfrm>
-            <a:off x="612648" y="1252728"/>
-            <a:ext cx="10698480" cy="438912"/>
-          </a:xfrm>
-          <a:prstGeom prst="rect">
-            <a:avLst/>
-          </a:prstGeom>
-          <a:noFill/>
-        </p:spPr>
-        <p:txBody>
-          <a:bodyPr wrap="square" lIns="54864" rIns="54864" tIns="54864" bIns="54864" anchor="ctr">
-            <a:normAutofit/>
-          </a:bodyPr>
-          <a:lstStyle/>
-          <a:p>
-            <a:pPr algn="l"/>
-            <a:r>
-              <a:rPr sz="1400" b="0">
-                <a:solidFill>
-                  <a:srgbClr val="5E6B82"/>
-                </a:solidFill>
-                <a:latin typeface="Aptos"/>
-              </a:rPr>
-              <a:t>Answers reflect retrieved decision evidence—not a generic persona or an invented preference.</a:t>
-            </a:r>
-          </a:p>
-        </p:txBody>
-      </p:sp>
-      <p:sp>
-        <p:nvSpPr>
-          <p:cNvPr id="5" name="Rounded Rectangle 4"/>
-          <p:cNvSpPr/>
-          <p:nvPr/>
-        </p:nvSpPr>
-        <p:spPr>
-          <a:xfrm>
-            <a:off x="640080" y="1828800"/>
-            <a:ext cx="3657600" cy="3611880"/>
-          </a:xfrm>
-          <a:prstGeom prst="roundRect">
-            <a:avLst/>
-          </a:prstGeom>
-          <a:solidFill>
-            <a:srgbClr val="0B1F3A"/>
-          </a:solidFill>
-          <a:ln w="15240">
-            <a:solidFill>
-              <a:srgbClr val="0B1F3A"/>
-            </a:solidFill>
-          </a:ln>
-        </p:spPr>
-        <p:style>
-          <a:lnRef idx="1">
-            <a:schemeClr val="accent1"/>
-          </a:lnRef>
-          <a:fillRef idx="3">
-            <a:schemeClr val="accent1"/>
-          </a:fillRef>
-          <a:effectRef idx="2">
-            <a:schemeClr val="accent1"/>
-          </a:effectRef>
-          <a:fontRef idx="minor">
-            <a:schemeClr val="lt1"/>
-          </a:fontRef>
-        </p:style>
-        <p:txBody>
-          <a:bodyPr rtlCol="0" anchor="ctr"/>
-          <a:lstStyle/>
-          <a:p>
-            <a:pPr algn="ctr"/>
-          </a:p>
-        </p:txBody>
-      </p:sp>
-      <p:sp>
-        <p:nvSpPr>
-          <p:cNvPr id="6" name="TextBox 5"/>
-          <p:cNvSpPr txBox="1"/>
-          <p:nvPr/>
-        </p:nvSpPr>
-        <p:spPr>
-          <a:xfrm>
-            <a:off x="960120" y="2103120"/>
-            <a:ext cx="731520" cy="274320"/>
-          </a:xfrm>
-          <a:prstGeom prst="rect">
-            <a:avLst/>
-          </a:prstGeom>
-          <a:noFill/>
-        </p:spPr>
-        <p:txBody>
-          <a:bodyPr wrap="square" lIns="54864" rIns="54864" tIns="54864" bIns="54864" anchor="ctr">
-            <a:normAutofit/>
-          </a:bodyPr>
-          <a:lstStyle/>
-          <a:p>
-            <a:pPr algn="l"/>
-            <a:r>
-              <a:rPr sz="1100" b="1">
-                <a:solidFill>
-                  <a:srgbClr val="65B5F6"/>
-                </a:solidFill>
-                <a:latin typeface="Aptos"/>
-              </a:rPr>
-              <a:t>ASK</a:t>
-            </a:r>
-          </a:p>
-        </p:txBody>
-      </p:sp>
-      <p:sp>
-        <p:nvSpPr>
-          <p:cNvPr id="7" name="TextBox 6"/>
-          <p:cNvSpPr txBox="1"/>
-          <p:nvPr/>
-        </p:nvSpPr>
-        <p:spPr>
-          <a:xfrm>
-            <a:off x="960120" y="2514600"/>
-            <a:ext cx="2971800" cy="1143000"/>
-          </a:xfrm>
-          <a:prstGeom prst="rect">
-            <a:avLst/>
-          </a:prstGeom>
-          <a:noFill/>
-        </p:spPr>
-        <p:txBody>
-          <a:bodyPr wrap="square" lIns="54864" rIns="54864" tIns="54864" bIns="54864" anchor="ctr">
-            <a:normAutofit/>
-          </a:bodyPr>
-          <a:lstStyle/>
-          <a:p>
-            <a:pPr algn="l"/>
-            <a:r>
-              <a:rPr sz="2400" b="1">
-                <a:solidFill>
-                  <a:srgbClr val="FFFFFF"/>
-                </a:solidFill>
-                <a:latin typeface="Aptos"/>
-              </a:rPr>
-              <a:t>“How should we recover from partial audit-pipeline failure without losing or duplicating data?”</a:t>
-            </a:r>
-          </a:p>
-        </p:txBody>
-      </p:sp>
-      <p:sp>
-        <p:nvSpPr>
-          <p:cNvPr id="8" name="Rounded Rectangle 7"/>
-          <p:cNvSpPr/>
-          <p:nvPr/>
-        </p:nvSpPr>
-        <p:spPr>
-          <a:xfrm>
-            <a:off x="960120" y="4160520"/>
-            <a:ext cx="2697480" cy="347472"/>
-          </a:xfrm>
-          <a:prstGeom prst="roundRect">
-            <a:avLst/>
-          </a:prstGeom>
-          <a:solidFill>
-            <a:srgbClr val="292C63"/>
-          </a:solidFill>
-          <a:ln w="15240">
-            <a:solidFill>
-              <a:srgbClr val="C9C8FF"/>
-            </a:solidFill>
-          </a:ln>
-        </p:spPr>
-        <p:style>
-          <a:lnRef idx="1">
-            <a:schemeClr val="accent1"/>
-          </a:lnRef>
-          <a:fillRef idx="3">
-            <a:schemeClr val="accent1"/>
-          </a:fillRef>
-          <a:effectRef idx="2">
-            <a:schemeClr val="accent1"/>
-          </a:effectRef>
-          <a:fontRef idx="minor">
-            <a:schemeClr val="lt1"/>
-          </a:fontRef>
-        </p:style>
-        <p:txBody>
-          <a:bodyPr rtlCol="0" anchor="ctr"/>
-          <a:lstStyle/>
-          <a:p>
-            <a:pPr algn="ctr"/>
-          </a:p>
-        </p:txBody>
-      </p:sp>
-      <p:sp>
-        <p:nvSpPr>
-          <p:cNvPr id="9" name="TextBox 8"/>
-          <p:cNvSpPr txBox="1"/>
-          <p:nvPr/>
-        </p:nvSpPr>
-        <p:spPr>
-          <a:xfrm>
-            <a:off x="1033272" y="4178807"/>
-            <a:ext cx="2551176" cy="274320"/>
-          </a:xfrm>
-          <a:prstGeom prst="rect">
-            <a:avLst/>
-          </a:prstGeom>
-          <a:noFill/>
-        </p:spPr>
-        <p:txBody>
-          <a:bodyPr wrap="square" lIns="54864" rIns="54864" tIns="54864" bIns="54864" anchor="ctr">
-            <a:normAutofit/>
-          </a:bodyPr>
-          <a:lstStyle/>
-          <a:p>
-            <a:pPr algn="ctr"/>
-            <a:r>
-              <a:rPr sz="1000" b="1">
-                <a:solidFill>
-                  <a:srgbClr val="C9C8FF"/>
-                </a:solidFill>
-                <a:latin typeface="Aptos"/>
-              </a:rPr>
-              <a:t>Selected: Rajendra Kalepu (AI Clone)</a:t>
-            </a:r>
-          </a:p>
-        </p:txBody>
-      </p:sp>
-      <p:sp>
-        <p:nvSpPr>
-          <p:cNvPr id="10" name="Rounded Rectangle 9"/>
-          <p:cNvSpPr/>
-          <p:nvPr/>
-        </p:nvSpPr>
-        <p:spPr>
-          <a:xfrm>
-            <a:off x="4617720" y="1828800"/>
-            <a:ext cx="6931152" cy="3611880"/>
-          </a:xfrm>
-          <a:prstGeom prst="roundRect">
-            <a:avLst/>
-          </a:prstGeom>
-          <a:solidFill>
-            <a:srgbClr val="FFFFFF"/>
-          </a:solidFill>
-          <a:ln w="15240">
-            <a:solidFill>
-              <a:srgbClr val="C8D5E6"/>
-            </a:solidFill>
-          </a:ln>
-        </p:spPr>
-        <p:style>
-          <a:lnRef idx="1">
-            <a:schemeClr val="accent1"/>
-          </a:lnRef>
-          <a:fillRef idx="3">
-            <a:schemeClr val="accent1"/>
-          </a:fillRef>
-          <a:effectRef idx="2">
-            <a:schemeClr val="accent1"/>
-          </a:effectRef>
-          <a:fontRef idx="minor">
-            <a:schemeClr val="lt1"/>
-          </a:fontRef>
-        </p:style>
-        <p:txBody>
-          <a:bodyPr rtlCol="0" anchor="ctr"/>
-          <a:lstStyle/>
-          <a:p>
-            <a:pPr algn="ctr"/>
-          </a:p>
-        </p:txBody>
-      </p:sp>
-      <p:sp>
-        <p:nvSpPr>
-          <p:cNvPr id="11" name="TextBox 10"/>
-          <p:cNvSpPr txBox="1"/>
-          <p:nvPr/>
-        </p:nvSpPr>
-        <p:spPr>
-          <a:xfrm>
-            <a:off x="4937760" y="2057400"/>
-            <a:ext cx="2560320" cy="274320"/>
-          </a:xfrm>
-          <a:prstGeom prst="rect">
-            <a:avLst/>
-          </a:prstGeom>
-          <a:noFill/>
-        </p:spPr>
-        <p:txBody>
-          <a:bodyPr wrap="square" lIns="54864" rIns="54864" tIns="54864" bIns="54864" anchor="ctr">
-            <a:normAutofit/>
-          </a:bodyPr>
-          <a:lstStyle/>
-          <a:p>
-            <a:pPr algn="l"/>
-            <a:r>
-              <a:rPr sz="1100" b="1">
-                <a:solidFill>
-                  <a:srgbClr val="0F9D8B"/>
-                </a:solidFill>
-                <a:latin typeface="Aptos"/>
-              </a:rPr>
-              <a:t>EVIDENCE-BACKED ANSWER</a:t>
-            </a:r>
-          </a:p>
-        </p:txBody>
-      </p:sp>
-      <p:sp>
-        <p:nvSpPr>
-          <p:cNvPr id="12" name="TextBox 11"/>
-          <p:cNvSpPr txBox="1"/>
-          <p:nvPr/>
-        </p:nvSpPr>
-        <p:spPr>
-          <a:xfrm>
-            <a:off x="4937760" y="2514600"/>
-            <a:ext cx="6172200" cy="1051560"/>
-          </a:xfrm>
-          <a:prstGeom prst="rect">
-            <a:avLst/>
-          </a:prstGeom>
-          <a:noFill/>
-        </p:spPr>
-        <p:txBody>
-          <a:bodyPr wrap="square" lIns="54864" rIns="54864" tIns="54864" bIns="54864" anchor="ctr">
-            <a:normAutofit/>
-          </a:bodyPr>
-          <a:lstStyle/>
-          <a:p>
-            <a:pPr algn="l"/>
-            <a:r>
-              <a:rPr sz="2000" b="1">
-                <a:solidFill>
-                  <a:srgbClr val="0B1F3A"/>
-                </a:solidFill>
-                <a:latin typeface="Aptos"/>
-              </a:rPr>
-              <a:t>Use deterministic checkpoints, explicit quarantine, and batch-level reconciliation. Treat pipeline completion as insufficient unless contract validity, freshness, uniqueness, and accepted-versus-rejected counts are observable.</a:t>
-            </a:r>
-          </a:p>
-        </p:txBody>
-      </p:sp>
-      <p:sp>
-        <p:nvSpPr>
-          <p:cNvPr id="13" name="Rounded Rectangle 12"/>
-          <p:cNvSpPr/>
-          <p:nvPr/>
-        </p:nvSpPr>
-        <p:spPr>
-          <a:xfrm>
-            <a:off x="4937760" y="3931920"/>
-            <a:ext cx="1965960" cy="347472"/>
-          </a:xfrm>
-          <a:prstGeom prst="roundRect">
-            <a:avLst/>
-          </a:prstGeom>
-          <a:solidFill>
-            <a:srgbClr val="E8F8F5"/>
-          </a:solidFill>
-          <a:ln w="15240">
-            <a:solidFill>
-              <a:srgbClr val="0F9D8B"/>
-            </a:solidFill>
-          </a:ln>
-        </p:spPr>
-        <p:style>
-          <a:lnRef idx="1">
-            <a:schemeClr val="accent1"/>
-          </a:lnRef>
-          <a:fillRef idx="3">
-            <a:schemeClr val="accent1"/>
-          </a:fillRef>
-          <a:effectRef idx="2">
-            <a:schemeClr val="accent1"/>
-          </a:effectRef>
-          <a:fontRef idx="minor">
-            <a:schemeClr val="lt1"/>
-          </a:fontRef>
-        </p:style>
-        <p:txBody>
-          <a:bodyPr rtlCol="0" anchor="ctr"/>
-          <a:lstStyle/>
-          <a:p>
-            <a:pPr algn="ctr"/>
-          </a:p>
-        </p:txBody>
-      </p:sp>
-      <p:sp>
-        <p:nvSpPr>
-          <p:cNvPr id="14" name="TextBox 13"/>
-          <p:cNvSpPr txBox="1"/>
-          <p:nvPr/>
-        </p:nvSpPr>
-        <p:spPr>
-          <a:xfrm>
-            <a:off x="5010912" y="3950207"/>
-            <a:ext cx="1819656" cy="274320"/>
-          </a:xfrm>
-          <a:prstGeom prst="rect">
-            <a:avLst/>
-          </a:prstGeom>
-          <a:noFill/>
-        </p:spPr>
-        <p:txBody>
-          <a:bodyPr wrap="square" lIns="54864" rIns="54864" tIns="54864" bIns="54864" anchor="ctr">
-            <a:normAutofit/>
-          </a:bodyPr>
-          <a:lstStyle/>
-          <a:p>
-            <a:pPr algn="ctr"/>
-            <a:r>
-              <a:rPr sz="1000" b="1">
-                <a:solidFill>
-                  <a:srgbClr val="0F9D8B"/>
-                </a:solidFill>
-                <a:latin typeface="Aptos"/>
-              </a:rPr>
-              <a:t>4 expert-attributed citations</a:t>
-            </a:r>
-          </a:p>
-        </p:txBody>
-      </p:sp>
-      <p:sp>
-        <p:nvSpPr>
-          <p:cNvPr id="15" name="Rounded Rectangle 14"/>
-          <p:cNvSpPr/>
-          <p:nvPr/>
-        </p:nvSpPr>
-        <p:spPr>
-          <a:xfrm>
-            <a:off x="7086600" y="3931920"/>
-            <a:ext cx="1417320" cy="347472"/>
-          </a:xfrm>
-          <a:prstGeom prst="roundRect">
-            <a:avLst/>
-          </a:prstGeom>
-          <a:solidFill>
-            <a:srgbClr val="F0EFFF"/>
-          </a:solidFill>
-          <a:ln w="15240">
-            <a:solidFill>
-              <a:srgbClr val="5B5BD6"/>
-            </a:solidFill>
-          </a:ln>
-        </p:spPr>
-        <p:style>
-          <a:lnRef idx="1">
-            <a:schemeClr val="accent1"/>
-          </a:lnRef>
-          <a:fillRef idx="3">
-            <a:schemeClr val="accent1"/>
-          </a:fillRef>
-          <a:effectRef idx="2">
-            <a:schemeClr val="accent1"/>
-          </a:effectRef>
-          <a:fontRef idx="minor">
-            <a:schemeClr val="lt1"/>
-          </a:fontRef>
-        </p:style>
-        <p:txBody>
-          <a:bodyPr rtlCol="0" anchor="ctr"/>
-          <a:lstStyle/>
-          <a:p>
-            <a:pPr algn="ctr"/>
-          </a:p>
-        </p:txBody>
-      </p:sp>
-      <p:sp>
-        <p:nvSpPr>
-          <p:cNvPr id="16" name="TextBox 15"/>
-          <p:cNvSpPr txBox="1"/>
-          <p:nvPr/>
-        </p:nvSpPr>
-        <p:spPr>
-          <a:xfrm>
-            <a:off x="7159752" y="3950207"/>
-            <a:ext cx="1271016" cy="274320"/>
-          </a:xfrm>
-          <a:prstGeom prst="rect">
-            <a:avLst/>
-          </a:prstGeom>
-          <a:noFill/>
-        </p:spPr>
-        <p:txBody>
-          <a:bodyPr wrap="square" lIns="54864" rIns="54864" tIns="54864" bIns="54864" anchor="ctr">
-            <a:normAutofit/>
-          </a:bodyPr>
-          <a:lstStyle/>
-          <a:p>
-            <a:pPr algn="ctr"/>
-            <a:r>
-              <a:rPr sz="1000" b="1">
-                <a:solidFill>
-                  <a:srgbClr val="5B5BD6"/>
-                </a:solidFill>
-                <a:latin typeface="Aptos"/>
-              </a:rPr>
-              <a:t>Inference labeled</a:t>
-            </a:r>
-          </a:p>
-        </p:txBody>
-      </p:sp>
-      <p:sp>
-        <p:nvSpPr>
-          <p:cNvPr id="17" name="Rounded Rectangle 16"/>
-          <p:cNvSpPr/>
-          <p:nvPr/>
-        </p:nvSpPr>
-        <p:spPr>
-          <a:xfrm>
-            <a:off x="8686800" y="3931920"/>
-            <a:ext cx="1600200" cy="347472"/>
-          </a:xfrm>
-          <a:prstGeom prst="roundRect">
-            <a:avLst/>
-          </a:prstGeom>
-          <a:solidFill>
-            <a:srgbClr val="FFF8E8"/>
-          </a:solidFill>
-          <a:ln w="15240">
-            <a:solidFill>
-              <a:srgbClr val="F4A623"/>
-            </a:solidFill>
-          </a:ln>
-        </p:spPr>
-        <p:style>
-          <a:lnRef idx="1">
-            <a:schemeClr val="accent1"/>
-          </a:lnRef>
-          <a:fillRef idx="3">
-            <a:schemeClr val="accent1"/>
-          </a:fillRef>
-          <a:effectRef idx="2">
-            <a:schemeClr val="accent1"/>
-          </a:effectRef>
-          <a:fontRef idx="minor">
-            <a:schemeClr val="lt1"/>
-          </a:fontRef>
-        </p:style>
-        <p:txBody>
-          <a:bodyPr rtlCol="0" anchor="ctr"/>
-          <a:lstStyle/>
-          <a:p>
-            <a:pPr algn="ctr"/>
-          </a:p>
-        </p:txBody>
-      </p:sp>
-      <p:sp>
-        <p:nvSpPr>
-          <p:cNvPr id="18" name="TextBox 17"/>
-          <p:cNvSpPr txBox="1"/>
-          <p:nvPr/>
-        </p:nvSpPr>
-        <p:spPr>
-          <a:xfrm>
-            <a:off x="8759952" y="3950207"/>
-            <a:ext cx="1453896" cy="274320"/>
-          </a:xfrm>
-          <a:prstGeom prst="rect">
-            <a:avLst/>
-          </a:prstGeom>
-          <a:noFill/>
-        </p:spPr>
-        <p:txBody>
-          <a:bodyPr wrap="square" lIns="54864" rIns="54864" tIns="54864" bIns="54864" anchor="ctr">
-            <a:normAutofit/>
-          </a:bodyPr>
-          <a:lstStyle/>
-          <a:p>
-            <a:pPr algn="ctr"/>
-            <a:r>
-              <a:rPr sz="1000" b="1">
-                <a:solidFill>
-                  <a:srgbClr val="F4A623"/>
-                </a:solidFill>
-                <a:latin typeface="Aptos"/>
-              </a:rPr>
-              <a:t>Uncertainty explicit</a:t>
-            </a:r>
-          </a:p>
-        </p:txBody>
-      </p:sp>
-      <p:sp>
-        <p:nvSpPr>
-          <p:cNvPr id="19" name="TextBox 18"/>
-          <p:cNvSpPr txBox="1"/>
-          <p:nvPr/>
-        </p:nvSpPr>
-        <p:spPr>
-          <a:xfrm>
-            <a:off x="4956048" y="4645152"/>
-            <a:ext cx="6080760" cy="475488"/>
-          </a:xfrm>
-          <a:prstGeom prst="rect">
-            <a:avLst/>
-          </a:prstGeom>
-          <a:noFill/>
-        </p:spPr>
-        <p:txBody>
-          <a:bodyPr wrap="square" lIns="54864" rIns="54864" tIns="54864" bIns="54864" anchor="ctr">
-            <a:normAutofit/>
-          </a:bodyPr>
-          <a:lstStyle/>
-          <a:p>
-            <a:pPr algn="l"/>
-            <a:r>
-              <a:rPr sz="1400" b="0">
-                <a:solidFill>
-                  <a:srgbClr val="5E6B82"/>
-                </a:solidFill>
-                <a:latin typeface="Aptos"/>
-              </a:rPr>
-              <a:t>Trust behavior: when the evidence does not establish a preference, ExpertTwin says so instead of attributing a fabricated opinion.</a:t>
-            </a:r>
-          </a:p>
-        </p:txBody>
-      </p:sp>
-      <p:sp>
-        <p:nvSpPr>
-          <p:cNvPr id="20" name="TextBox 19"/>
-          <p:cNvSpPr txBox="1"/>
-          <p:nvPr/>
-        </p:nvSpPr>
-        <p:spPr>
-          <a:xfrm>
-            <a:off x="594360" y="6519672"/>
-            <a:ext cx="4114800" cy="164592"/>
-          </a:xfrm>
-          <a:prstGeom prst="rect">
-            <a:avLst/>
-          </a:prstGeom>
-          <a:noFill/>
-        </p:spPr>
-        <p:txBody>
-          <a:bodyPr wrap="square" lIns="54864" rIns="54864" tIns="54864" bIns="54864" anchor="ctr">
-            <a:normAutofit/>
-          </a:bodyPr>
-          <a:lstStyle/>
-          <a:p>
-            <a:pPr algn="l"/>
-            <a:r>
-              <a:rPr sz="800" b="1">
-                <a:solidFill>
-                  <a:srgbClr val="5E6B82"/>
-                </a:solidFill>
-                <a:latin typeface="Aptos"/>
-              </a:rPr>
-              <a:t>EXPERTTWIN · HACKATHON DEMO</a:t>
-            </a:r>
-          </a:p>
-        </p:txBody>
-      </p:sp>
-      <p:sp>
-        <p:nvSpPr>
-          <p:cNvPr id="21" name="TextBox 20"/>
-          <p:cNvSpPr txBox="1"/>
-          <p:nvPr/>
-        </p:nvSpPr>
-        <p:spPr>
-          <a:xfrm>
-            <a:off x="11201400" y="6492240"/>
-            <a:ext cx="411480" cy="201168"/>
-          </a:xfrm>
-          <a:prstGeom prst="rect">
-            <a:avLst/>
-          </a:prstGeom>
-          <a:noFill/>
-        </p:spPr>
-        <p:txBody>
-          <a:bodyPr wrap="square" lIns="54864" rIns="54864" tIns="54864" bIns="54864" anchor="ctr">
-            <a:normAutofit/>
-          </a:bodyPr>
-          <a:lstStyle/>
-          <a:p>
-            <a:pPr algn="r"/>
-            <a:r>
-              <a:rPr sz="900" b="1">
-                <a:solidFill>
-                  <a:srgbClr val="5E6B82"/>
-                </a:solidFill>
-                <a:latin typeface="Aptos"/>
-              </a:rPr>
-              <a:t>6</a:t>
-            </a:r>
-          </a:p>
-        </p:txBody>
-      </p:sp>
+      <p:pic>
+        <p:nvPicPr>
+          <p:cNvPr id="2" name="Picture 1" descr="ExpertTwin-Azure-Architecture.png"/>
+          <p:cNvPicPr>
+            <a:picLocks noChangeAspect="1"/>
+          </p:cNvPicPr>
+          <p:nvPr/>
+        </p:nvPicPr>
+        <p:blipFill>
+          <a:blip r:embed="rId2"/>
+          <a:stretch>
+            <a:fillRect/>
+          </a:stretch>
+        </p:blipFill>
+        <p:spPr>
+          <a:xfrm>
+            <a:off x="0" y="0"/>
+            <a:ext cx="12191695" cy="6857828"/>
+          </a:xfrm>
+          <a:prstGeom prst="rect">
+            <a:avLst/>
+          </a:prstGeom>
+        </p:spPr>
+      </p:pic>
     </p:spTree>
   </p:cSld>
   <p:clrMapOvr>
@@ -9308,6 +9506,792 @@
 </file>
 
 <file path=ppt/slides/slide7.xml><?xml version="1.0" encoding="utf-8"?>
+<p:sld xmlns:a="http://schemas.openxmlformats.org/drawingml/2006/main" xmlns:p="http://schemas.openxmlformats.org/presentationml/2006/main" xmlns:r="http://schemas.openxmlformats.org/officeDocument/2006/relationships">
+  <p:cSld>
+    <p:bg>
+      <p:bgPr>
+        <a:solidFill>
+          <a:srgbClr val="F3F7FC"/>
+        </a:solidFill>
+        <a:effectLst/>
+      </p:bgPr>
+    </p:bg>
+    <p:spTree>
+      <p:nvGrpSpPr>
+        <p:cNvPr id="1" name=""/>
+        <p:cNvGrpSpPr/>
+        <p:nvPr/>
+      </p:nvGrpSpPr>
+      <p:grpSpPr/>
+      <p:sp>
+        <p:nvSpPr>
+          <p:cNvPr id="2" name="TextBox 1"/>
+          <p:cNvSpPr txBox="1"/>
+          <p:nvPr/>
+        </p:nvSpPr>
+        <p:spPr>
+          <a:xfrm>
+            <a:off x="594360" y="292608"/>
+            <a:ext cx="10972800" cy="320040"/>
+          </a:xfrm>
+          <a:prstGeom prst="rect">
+            <a:avLst/>
+          </a:prstGeom>
+          <a:noFill/>
+        </p:spPr>
+        <p:txBody>
+          <a:bodyPr wrap="square" lIns="54864" rIns="54864" tIns="54864" bIns="54864" anchor="ctr">
+            <a:normAutofit/>
+          </a:bodyPr>
+          <a:lstStyle/>
+          <a:p>
+            <a:pPr algn="l"/>
+            <a:r>
+              <a:rPr sz="1100" b="1">
+                <a:solidFill>
+                  <a:srgbClr val="0078D4"/>
+                </a:solidFill>
+                <a:latin typeface="Aptos"/>
+              </a:rPr>
+              <a:t>EXPERIENCE 1</a:t>
+            </a:r>
+          </a:p>
+        </p:txBody>
+      </p:sp>
+      <p:sp>
+        <p:nvSpPr>
+          <p:cNvPr id="3" name="TextBox 2"/>
+          <p:cNvSpPr txBox="1"/>
+          <p:nvPr/>
+        </p:nvSpPr>
+        <p:spPr>
+          <a:xfrm>
+            <a:off x="594360" y="621792"/>
+            <a:ext cx="10972800" cy="658368"/>
+          </a:xfrm>
+          <a:prstGeom prst="rect">
+            <a:avLst/>
+          </a:prstGeom>
+          <a:noFill/>
+        </p:spPr>
+        <p:txBody>
+          <a:bodyPr wrap="square" lIns="54864" rIns="54864" tIns="54864" bIns="54864" anchor="ctr">
+            <a:normAutofit/>
+          </a:bodyPr>
+          <a:lstStyle/>
+          <a:p>
+            <a:pPr algn="l"/>
+            <a:r>
+              <a:rPr sz="2800" b="1">
+                <a:solidFill>
+                  <a:srgbClr val="0B1F3A"/>
+                </a:solidFill>
+                <a:latin typeface="Aptos"/>
+              </a:rPr>
+              <a:t>Ask one expert’s AI Clone.</a:t>
+            </a:r>
+          </a:p>
+        </p:txBody>
+      </p:sp>
+      <p:sp>
+        <p:nvSpPr>
+          <p:cNvPr id="4" name="TextBox 3"/>
+          <p:cNvSpPr txBox="1"/>
+          <p:nvPr/>
+        </p:nvSpPr>
+        <p:spPr>
+          <a:xfrm>
+            <a:off x="612648" y="1252728"/>
+            <a:ext cx="10698480" cy="438912"/>
+          </a:xfrm>
+          <a:prstGeom prst="rect">
+            <a:avLst/>
+          </a:prstGeom>
+          <a:noFill/>
+        </p:spPr>
+        <p:txBody>
+          <a:bodyPr wrap="square" lIns="54864" rIns="54864" tIns="54864" bIns="54864" anchor="ctr">
+            <a:normAutofit/>
+          </a:bodyPr>
+          <a:lstStyle/>
+          <a:p>
+            <a:pPr algn="l"/>
+            <a:r>
+              <a:rPr sz="1400" b="0">
+                <a:solidFill>
+                  <a:srgbClr val="5E6B82"/>
+                </a:solidFill>
+                <a:latin typeface="Aptos"/>
+              </a:rPr>
+              <a:t>Answers reflect retrieved decision evidence—not a generic persona or an invented preference.</a:t>
+            </a:r>
+          </a:p>
+        </p:txBody>
+      </p:sp>
+      <p:sp>
+        <p:nvSpPr>
+          <p:cNvPr id="5" name="Rounded Rectangle 4"/>
+          <p:cNvSpPr/>
+          <p:nvPr/>
+        </p:nvSpPr>
+        <p:spPr>
+          <a:xfrm>
+            <a:off x="640080" y="1828800"/>
+            <a:ext cx="3657600" cy="3611880"/>
+          </a:xfrm>
+          <a:prstGeom prst="roundRect">
+            <a:avLst/>
+          </a:prstGeom>
+          <a:solidFill>
+            <a:srgbClr val="0B1F3A"/>
+          </a:solidFill>
+          <a:ln w="15240">
+            <a:solidFill>
+              <a:srgbClr val="0B1F3A"/>
+            </a:solidFill>
+          </a:ln>
+        </p:spPr>
+        <p:style>
+          <a:lnRef idx="1">
+            <a:schemeClr val="accent1"/>
+          </a:lnRef>
+          <a:fillRef idx="3">
+            <a:schemeClr val="accent1"/>
+          </a:fillRef>
+          <a:effectRef idx="2">
+            <a:schemeClr val="accent1"/>
+          </a:effectRef>
+          <a:fontRef idx="minor">
+            <a:schemeClr val="lt1"/>
+          </a:fontRef>
+        </p:style>
+        <p:txBody>
+          <a:bodyPr rtlCol="0" anchor="ctr"/>
+          <a:lstStyle/>
+          <a:p>
+            <a:pPr algn="ctr"/>
+          </a:p>
+        </p:txBody>
+      </p:sp>
+      <p:sp>
+        <p:nvSpPr>
+          <p:cNvPr id="6" name="TextBox 5"/>
+          <p:cNvSpPr txBox="1"/>
+          <p:nvPr/>
+        </p:nvSpPr>
+        <p:spPr>
+          <a:xfrm>
+            <a:off x="960120" y="2103120"/>
+            <a:ext cx="731520" cy="274320"/>
+          </a:xfrm>
+          <a:prstGeom prst="rect">
+            <a:avLst/>
+          </a:prstGeom>
+          <a:noFill/>
+        </p:spPr>
+        <p:txBody>
+          <a:bodyPr wrap="square" lIns="54864" rIns="54864" tIns="54864" bIns="54864" anchor="ctr">
+            <a:normAutofit/>
+          </a:bodyPr>
+          <a:lstStyle/>
+          <a:p>
+            <a:pPr algn="l"/>
+            <a:r>
+              <a:rPr sz="1100" b="1">
+                <a:solidFill>
+                  <a:srgbClr val="65B5F6"/>
+                </a:solidFill>
+                <a:latin typeface="Aptos"/>
+              </a:rPr>
+              <a:t>ASK</a:t>
+            </a:r>
+          </a:p>
+        </p:txBody>
+      </p:sp>
+      <p:sp>
+        <p:nvSpPr>
+          <p:cNvPr id="7" name="TextBox 6"/>
+          <p:cNvSpPr txBox="1"/>
+          <p:nvPr/>
+        </p:nvSpPr>
+        <p:spPr>
+          <a:xfrm>
+            <a:off x="960120" y="2514600"/>
+            <a:ext cx="2971800" cy="1143000"/>
+          </a:xfrm>
+          <a:prstGeom prst="rect">
+            <a:avLst/>
+          </a:prstGeom>
+          <a:noFill/>
+        </p:spPr>
+        <p:txBody>
+          <a:bodyPr wrap="square" lIns="54864" rIns="54864" tIns="54864" bIns="54864" anchor="ctr">
+            <a:normAutofit/>
+          </a:bodyPr>
+          <a:lstStyle/>
+          <a:p>
+            <a:pPr algn="l"/>
+            <a:r>
+              <a:rPr sz="2400" b="1">
+                <a:solidFill>
+                  <a:srgbClr val="FFFFFF"/>
+                </a:solidFill>
+                <a:latin typeface="Aptos"/>
+              </a:rPr>
+              <a:t>“How should we recover from partial audit-pipeline failure without losing or duplicating data?”</a:t>
+            </a:r>
+          </a:p>
+        </p:txBody>
+      </p:sp>
+      <p:sp>
+        <p:nvSpPr>
+          <p:cNvPr id="8" name="Rounded Rectangle 7"/>
+          <p:cNvSpPr/>
+          <p:nvPr/>
+        </p:nvSpPr>
+        <p:spPr>
+          <a:xfrm>
+            <a:off x="960120" y="4160520"/>
+            <a:ext cx="2697480" cy="347472"/>
+          </a:xfrm>
+          <a:prstGeom prst="roundRect">
+            <a:avLst/>
+          </a:prstGeom>
+          <a:solidFill>
+            <a:srgbClr val="292C63"/>
+          </a:solidFill>
+          <a:ln w="15240">
+            <a:solidFill>
+              <a:srgbClr val="C9C8FF"/>
+            </a:solidFill>
+          </a:ln>
+        </p:spPr>
+        <p:style>
+          <a:lnRef idx="1">
+            <a:schemeClr val="accent1"/>
+          </a:lnRef>
+          <a:fillRef idx="3">
+            <a:schemeClr val="accent1"/>
+          </a:fillRef>
+          <a:effectRef idx="2">
+            <a:schemeClr val="accent1"/>
+          </a:effectRef>
+          <a:fontRef idx="minor">
+            <a:schemeClr val="lt1"/>
+          </a:fontRef>
+        </p:style>
+        <p:txBody>
+          <a:bodyPr rtlCol="0" anchor="ctr"/>
+          <a:lstStyle/>
+          <a:p>
+            <a:pPr algn="ctr"/>
+          </a:p>
+        </p:txBody>
+      </p:sp>
+      <p:sp>
+        <p:nvSpPr>
+          <p:cNvPr id="9" name="TextBox 8"/>
+          <p:cNvSpPr txBox="1"/>
+          <p:nvPr/>
+        </p:nvSpPr>
+        <p:spPr>
+          <a:xfrm>
+            <a:off x="1033272" y="4178807"/>
+            <a:ext cx="2551176" cy="274320"/>
+          </a:xfrm>
+          <a:prstGeom prst="rect">
+            <a:avLst/>
+          </a:prstGeom>
+          <a:noFill/>
+        </p:spPr>
+        <p:txBody>
+          <a:bodyPr wrap="square" lIns="54864" rIns="54864" tIns="54864" bIns="54864" anchor="ctr">
+            <a:normAutofit/>
+          </a:bodyPr>
+          <a:lstStyle/>
+          <a:p>
+            <a:pPr algn="ctr"/>
+            <a:r>
+              <a:rPr sz="1000" b="1">
+                <a:solidFill>
+                  <a:srgbClr val="C9C8FF"/>
+                </a:solidFill>
+                <a:latin typeface="Aptos"/>
+              </a:rPr>
+              <a:t>Selected: Rajendra Kalepu (AI Clone)</a:t>
+            </a:r>
+          </a:p>
+        </p:txBody>
+      </p:sp>
+      <p:sp>
+        <p:nvSpPr>
+          <p:cNvPr id="10" name="Rounded Rectangle 9"/>
+          <p:cNvSpPr/>
+          <p:nvPr/>
+        </p:nvSpPr>
+        <p:spPr>
+          <a:xfrm>
+            <a:off x="4617720" y="1828800"/>
+            <a:ext cx="6931152" cy="3611880"/>
+          </a:xfrm>
+          <a:prstGeom prst="roundRect">
+            <a:avLst/>
+          </a:prstGeom>
+          <a:solidFill>
+            <a:srgbClr val="FFFFFF"/>
+          </a:solidFill>
+          <a:ln w="15240">
+            <a:solidFill>
+              <a:srgbClr val="C8D5E6"/>
+            </a:solidFill>
+          </a:ln>
+        </p:spPr>
+        <p:style>
+          <a:lnRef idx="1">
+            <a:schemeClr val="accent1"/>
+          </a:lnRef>
+          <a:fillRef idx="3">
+            <a:schemeClr val="accent1"/>
+          </a:fillRef>
+          <a:effectRef idx="2">
+            <a:schemeClr val="accent1"/>
+          </a:effectRef>
+          <a:fontRef idx="minor">
+            <a:schemeClr val="lt1"/>
+          </a:fontRef>
+        </p:style>
+        <p:txBody>
+          <a:bodyPr rtlCol="0" anchor="ctr"/>
+          <a:lstStyle/>
+          <a:p>
+            <a:pPr algn="ctr"/>
+          </a:p>
+        </p:txBody>
+      </p:sp>
+      <p:sp>
+        <p:nvSpPr>
+          <p:cNvPr id="11" name="TextBox 10"/>
+          <p:cNvSpPr txBox="1"/>
+          <p:nvPr/>
+        </p:nvSpPr>
+        <p:spPr>
+          <a:xfrm>
+            <a:off x="4937760" y="2057400"/>
+            <a:ext cx="2560320" cy="274320"/>
+          </a:xfrm>
+          <a:prstGeom prst="rect">
+            <a:avLst/>
+          </a:prstGeom>
+          <a:noFill/>
+        </p:spPr>
+        <p:txBody>
+          <a:bodyPr wrap="square" lIns="54864" rIns="54864" tIns="54864" bIns="54864" anchor="ctr">
+            <a:normAutofit/>
+          </a:bodyPr>
+          <a:lstStyle/>
+          <a:p>
+            <a:pPr algn="l"/>
+            <a:r>
+              <a:rPr sz="1100" b="1">
+                <a:solidFill>
+                  <a:srgbClr val="0F9D8B"/>
+                </a:solidFill>
+                <a:latin typeface="Aptos"/>
+              </a:rPr>
+              <a:t>EVIDENCE-BACKED ANSWER</a:t>
+            </a:r>
+          </a:p>
+        </p:txBody>
+      </p:sp>
+      <p:sp>
+        <p:nvSpPr>
+          <p:cNvPr id="12" name="TextBox 11"/>
+          <p:cNvSpPr txBox="1"/>
+          <p:nvPr/>
+        </p:nvSpPr>
+        <p:spPr>
+          <a:xfrm>
+            <a:off x="4937760" y="2514600"/>
+            <a:ext cx="6172200" cy="1051560"/>
+          </a:xfrm>
+          <a:prstGeom prst="rect">
+            <a:avLst/>
+          </a:prstGeom>
+          <a:noFill/>
+        </p:spPr>
+        <p:txBody>
+          <a:bodyPr wrap="square" lIns="54864" rIns="54864" tIns="54864" bIns="54864" anchor="ctr">
+            <a:normAutofit/>
+          </a:bodyPr>
+          <a:lstStyle/>
+          <a:p>
+            <a:pPr algn="l"/>
+            <a:r>
+              <a:rPr sz="2000" b="1">
+                <a:solidFill>
+                  <a:srgbClr val="0B1F3A"/>
+                </a:solidFill>
+                <a:latin typeface="Aptos"/>
+              </a:rPr>
+              <a:t>Use deterministic checkpoints, explicit quarantine, and batch-level reconciliation. Treat pipeline completion as insufficient unless contract validity, freshness, uniqueness, and accepted-versus-rejected counts are observable.</a:t>
+            </a:r>
+          </a:p>
+        </p:txBody>
+      </p:sp>
+      <p:sp>
+        <p:nvSpPr>
+          <p:cNvPr id="13" name="Rounded Rectangle 12"/>
+          <p:cNvSpPr/>
+          <p:nvPr/>
+        </p:nvSpPr>
+        <p:spPr>
+          <a:xfrm>
+            <a:off x="4937760" y="3931920"/>
+            <a:ext cx="1965960" cy="347472"/>
+          </a:xfrm>
+          <a:prstGeom prst="roundRect">
+            <a:avLst/>
+          </a:prstGeom>
+          <a:solidFill>
+            <a:srgbClr val="E8F8F5"/>
+          </a:solidFill>
+          <a:ln w="15240">
+            <a:solidFill>
+              <a:srgbClr val="0F9D8B"/>
+            </a:solidFill>
+          </a:ln>
+        </p:spPr>
+        <p:style>
+          <a:lnRef idx="1">
+            <a:schemeClr val="accent1"/>
+          </a:lnRef>
+          <a:fillRef idx="3">
+            <a:schemeClr val="accent1"/>
+          </a:fillRef>
+          <a:effectRef idx="2">
+            <a:schemeClr val="accent1"/>
+          </a:effectRef>
+          <a:fontRef idx="minor">
+            <a:schemeClr val="lt1"/>
+          </a:fontRef>
+        </p:style>
+        <p:txBody>
+          <a:bodyPr rtlCol="0" anchor="ctr"/>
+          <a:lstStyle/>
+          <a:p>
+            <a:pPr algn="ctr"/>
+          </a:p>
+        </p:txBody>
+      </p:sp>
+      <p:sp>
+        <p:nvSpPr>
+          <p:cNvPr id="14" name="TextBox 13"/>
+          <p:cNvSpPr txBox="1"/>
+          <p:nvPr/>
+        </p:nvSpPr>
+        <p:spPr>
+          <a:xfrm>
+            <a:off x="5010912" y="3950207"/>
+            <a:ext cx="1819656" cy="274320"/>
+          </a:xfrm>
+          <a:prstGeom prst="rect">
+            <a:avLst/>
+          </a:prstGeom>
+          <a:noFill/>
+        </p:spPr>
+        <p:txBody>
+          <a:bodyPr wrap="square" lIns="54864" rIns="54864" tIns="54864" bIns="54864" anchor="ctr">
+            <a:normAutofit/>
+          </a:bodyPr>
+          <a:lstStyle/>
+          <a:p>
+            <a:pPr algn="ctr"/>
+            <a:r>
+              <a:rPr sz="1000" b="1">
+                <a:solidFill>
+                  <a:srgbClr val="0F9D8B"/>
+                </a:solidFill>
+                <a:latin typeface="Aptos"/>
+              </a:rPr>
+              <a:t>4 expert-attributed citations</a:t>
+            </a:r>
+          </a:p>
+        </p:txBody>
+      </p:sp>
+      <p:sp>
+        <p:nvSpPr>
+          <p:cNvPr id="15" name="Rounded Rectangle 14"/>
+          <p:cNvSpPr/>
+          <p:nvPr/>
+        </p:nvSpPr>
+        <p:spPr>
+          <a:xfrm>
+            <a:off x="7086600" y="3931920"/>
+            <a:ext cx="1417320" cy="347472"/>
+          </a:xfrm>
+          <a:prstGeom prst="roundRect">
+            <a:avLst/>
+          </a:prstGeom>
+          <a:solidFill>
+            <a:srgbClr val="F0EFFF"/>
+          </a:solidFill>
+          <a:ln w="15240">
+            <a:solidFill>
+              <a:srgbClr val="5B5BD6"/>
+            </a:solidFill>
+          </a:ln>
+        </p:spPr>
+        <p:style>
+          <a:lnRef idx="1">
+            <a:schemeClr val="accent1"/>
+          </a:lnRef>
+          <a:fillRef idx="3">
+            <a:schemeClr val="accent1"/>
+          </a:fillRef>
+          <a:effectRef idx="2">
+            <a:schemeClr val="accent1"/>
+          </a:effectRef>
+          <a:fontRef idx="minor">
+            <a:schemeClr val="lt1"/>
+          </a:fontRef>
+        </p:style>
+        <p:txBody>
+          <a:bodyPr rtlCol="0" anchor="ctr"/>
+          <a:lstStyle/>
+          <a:p>
+            <a:pPr algn="ctr"/>
+          </a:p>
+        </p:txBody>
+      </p:sp>
+      <p:sp>
+        <p:nvSpPr>
+          <p:cNvPr id="16" name="TextBox 15"/>
+          <p:cNvSpPr txBox="1"/>
+          <p:nvPr/>
+        </p:nvSpPr>
+        <p:spPr>
+          <a:xfrm>
+            <a:off x="7159752" y="3950207"/>
+            <a:ext cx="1271016" cy="274320"/>
+          </a:xfrm>
+          <a:prstGeom prst="rect">
+            <a:avLst/>
+          </a:prstGeom>
+          <a:noFill/>
+        </p:spPr>
+        <p:txBody>
+          <a:bodyPr wrap="square" lIns="54864" rIns="54864" tIns="54864" bIns="54864" anchor="ctr">
+            <a:normAutofit/>
+          </a:bodyPr>
+          <a:lstStyle/>
+          <a:p>
+            <a:pPr algn="ctr"/>
+            <a:r>
+              <a:rPr sz="1000" b="1">
+                <a:solidFill>
+                  <a:srgbClr val="5B5BD6"/>
+                </a:solidFill>
+                <a:latin typeface="Aptos"/>
+              </a:rPr>
+              <a:t>Inference labeled</a:t>
+            </a:r>
+          </a:p>
+        </p:txBody>
+      </p:sp>
+      <p:sp>
+        <p:nvSpPr>
+          <p:cNvPr id="17" name="Rounded Rectangle 16"/>
+          <p:cNvSpPr/>
+          <p:nvPr/>
+        </p:nvSpPr>
+        <p:spPr>
+          <a:xfrm>
+            <a:off x="8686800" y="3931920"/>
+            <a:ext cx="1600200" cy="347472"/>
+          </a:xfrm>
+          <a:prstGeom prst="roundRect">
+            <a:avLst/>
+          </a:prstGeom>
+          <a:solidFill>
+            <a:srgbClr val="FFF8E8"/>
+          </a:solidFill>
+          <a:ln w="15240">
+            <a:solidFill>
+              <a:srgbClr val="F4A623"/>
+            </a:solidFill>
+          </a:ln>
+        </p:spPr>
+        <p:style>
+          <a:lnRef idx="1">
+            <a:schemeClr val="accent1"/>
+          </a:lnRef>
+          <a:fillRef idx="3">
+            <a:schemeClr val="accent1"/>
+          </a:fillRef>
+          <a:effectRef idx="2">
+            <a:schemeClr val="accent1"/>
+          </a:effectRef>
+          <a:fontRef idx="minor">
+            <a:schemeClr val="lt1"/>
+          </a:fontRef>
+        </p:style>
+        <p:txBody>
+          <a:bodyPr rtlCol="0" anchor="ctr"/>
+          <a:lstStyle/>
+          <a:p>
+            <a:pPr algn="ctr"/>
+          </a:p>
+        </p:txBody>
+      </p:sp>
+      <p:sp>
+        <p:nvSpPr>
+          <p:cNvPr id="18" name="TextBox 17"/>
+          <p:cNvSpPr txBox="1"/>
+          <p:nvPr/>
+        </p:nvSpPr>
+        <p:spPr>
+          <a:xfrm>
+            <a:off x="8759952" y="3950207"/>
+            <a:ext cx="1453896" cy="274320"/>
+          </a:xfrm>
+          <a:prstGeom prst="rect">
+            <a:avLst/>
+          </a:prstGeom>
+          <a:noFill/>
+        </p:spPr>
+        <p:txBody>
+          <a:bodyPr wrap="square" lIns="54864" rIns="54864" tIns="54864" bIns="54864" anchor="ctr">
+            <a:normAutofit/>
+          </a:bodyPr>
+          <a:lstStyle/>
+          <a:p>
+            <a:pPr algn="ctr"/>
+            <a:r>
+              <a:rPr sz="1000" b="1">
+                <a:solidFill>
+                  <a:srgbClr val="F4A623"/>
+                </a:solidFill>
+                <a:latin typeface="Aptos"/>
+              </a:rPr>
+              <a:t>Uncertainty explicit</a:t>
+            </a:r>
+          </a:p>
+        </p:txBody>
+      </p:sp>
+      <p:sp>
+        <p:nvSpPr>
+          <p:cNvPr id="19" name="TextBox 18"/>
+          <p:cNvSpPr txBox="1"/>
+          <p:nvPr/>
+        </p:nvSpPr>
+        <p:spPr>
+          <a:xfrm>
+            <a:off x="4956048" y="4645152"/>
+            <a:ext cx="6080760" cy="475488"/>
+          </a:xfrm>
+          <a:prstGeom prst="rect">
+            <a:avLst/>
+          </a:prstGeom>
+          <a:noFill/>
+        </p:spPr>
+        <p:txBody>
+          <a:bodyPr wrap="square" lIns="54864" rIns="54864" tIns="54864" bIns="54864" anchor="ctr">
+            <a:normAutofit/>
+          </a:bodyPr>
+          <a:lstStyle/>
+          <a:p>
+            <a:pPr algn="l"/>
+            <a:r>
+              <a:rPr sz="1400" b="0">
+                <a:solidFill>
+                  <a:srgbClr val="5E6B82"/>
+                </a:solidFill>
+                <a:latin typeface="Aptos"/>
+              </a:rPr>
+              <a:t>Trust behavior: when the evidence does not establish a preference, ExpertTwin says so instead of attributing a fabricated opinion.</a:t>
+            </a:r>
+          </a:p>
+        </p:txBody>
+      </p:sp>
+      <p:sp>
+        <p:nvSpPr>
+          <p:cNvPr id="20" name="TextBox 19"/>
+          <p:cNvSpPr txBox="1"/>
+          <p:nvPr/>
+        </p:nvSpPr>
+        <p:spPr>
+          <a:xfrm>
+            <a:off x="594360" y="6519672"/>
+            <a:ext cx="4114800" cy="164592"/>
+          </a:xfrm>
+          <a:prstGeom prst="rect">
+            <a:avLst/>
+          </a:prstGeom>
+          <a:noFill/>
+        </p:spPr>
+        <p:txBody>
+          <a:bodyPr wrap="square" lIns="54864" rIns="54864" tIns="54864" bIns="54864" anchor="ctr">
+            <a:normAutofit/>
+          </a:bodyPr>
+          <a:lstStyle/>
+          <a:p>
+            <a:pPr algn="l"/>
+            <a:r>
+              <a:rPr sz="800" b="1">
+                <a:solidFill>
+                  <a:srgbClr val="5E6B82"/>
+                </a:solidFill>
+                <a:latin typeface="Aptos"/>
+              </a:rPr>
+              <a:t>EXPERTTWIN · HACKATHON DEMO</a:t>
+            </a:r>
+          </a:p>
+        </p:txBody>
+      </p:sp>
+      <p:sp>
+        <p:nvSpPr>
+          <p:cNvPr id="21" name="TextBox 20"/>
+          <p:cNvSpPr txBox="1"/>
+          <p:nvPr/>
+        </p:nvSpPr>
+        <p:spPr>
+          <a:xfrm>
+            <a:off x="11201400" y="6492240"/>
+            <a:ext cx="411480" cy="201168"/>
+          </a:xfrm>
+          <a:prstGeom prst="rect">
+            <a:avLst/>
+          </a:prstGeom>
+          <a:noFill/>
+        </p:spPr>
+        <p:txBody>
+          <a:bodyPr wrap="square" lIns="54864" rIns="54864" tIns="54864" bIns="54864" anchor="ctr">
+            <a:normAutofit/>
+          </a:bodyPr>
+          <a:lstStyle/>
+          <a:p>
+            <a:pPr algn="r"/>
+            <a:r>
+              <a:rPr sz="900" b="1">
+                <a:solidFill>
+                  <a:srgbClr val="5E6B82"/>
+                </a:solidFill>
+                <a:latin typeface="Aptos"/>
+              </a:rPr>
+              <a:t>7</a:t>
+            </a:r>
+          </a:p>
+        </p:txBody>
+      </p:sp>
+    </p:spTree>
+  </p:cSld>
+  <p:clrMapOvr>
+    <a:masterClrMapping/>
+  </p:clrMapOvr>
+</p:sld>
+</file>
+
+<file path=ppt/slides/slide8.xml><?xml version="1.0" encoding="utf-8"?>
 <p:sld xmlns:a="http://schemas.openxmlformats.org/drawingml/2006/main" xmlns:p="http://schemas.openxmlformats.org/presentationml/2006/main" xmlns:r="http://schemas.openxmlformats.org/officeDocument/2006/relationships">
   <p:cSld>
     <p:bg>
@@ -10865,7 +11849,7 @@
                 </a:solidFill>
                 <a:latin typeface="Aptos"/>
               </a:rPr>
-              <a:t>7</a:t>
+              <a:t>8</a:t>
             </a:r>
           </a:p>
         </p:txBody>
@@ -10878,7 +11862,7 @@
 </p:sld>
 </file>
 
-<file path=ppt/slides/slide8.xml><?xml version="1.0" encoding="utf-8"?>
+<file path=ppt/slides/slide9.xml><?xml version="1.0" encoding="utf-8"?>
 <p:sld xmlns:a="http://schemas.openxmlformats.org/drawingml/2006/main" xmlns:p="http://schemas.openxmlformats.org/presentationml/2006/main" xmlns:r="http://schemas.openxmlformats.org/officeDocument/2006/relationships">
   <p:cSld>
     <p:bg>
@@ -13599,939 +14583,6 @@
       <p:sp>
         <p:nvSpPr>
           <p:cNvPr id="70" name="TextBox 69"/>
-          <p:cNvSpPr txBox="1"/>
-          <p:nvPr/>
-        </p:nvSpPr>
-        <p:spPr>
-          <a:xfrm>
-            <a:off x="11201400" y="6492240"/>
-            <a:ext cx="411480" cy="201168"/>
-          </a:xfrm>
-          <a:prstGeom prst="rect">
-            <a:avLst/>
-          </a:prstGeom>
-          <a:noFill/>
-        </p:spPr>
-        <p:txBody>
-          <a:bodyPr wrap="square" lIns="54864" rIns="54864" tIns="54864" bIns="54864" anchor="ctr">
-            <a:normAutofit/>
-          </a:bodyPr>
-          <a:lstStyle/>
-          <a:p>
-            <a:pPr algn="r"/>
-            <a:r>
-              <a:rPr sz="900" b="1">
-                <a:solidFill>
-                  <a:srgbClr val="5E6B82"/>
-                </a:solidFill>
-                <a:latin typeface="Aptos"/>
-              </a:rPr>
-              <a:t>8</a:t>
-            </a:r>
-          </a:p>
-        </p:txBody>
-      </p:sp>
-    </p:spTree>
-  </p:cSld>
-  <p:clrMapOvr>
-    <a:masterClrMapping/>
-  </p:clrMapOvr>
-</p:sld>
-</file>
-
-<file path=ppt/slides/slide9.xml><?xml version="1.0" encoding="utf-8"?>
-<p:sld xmlns:a="http://schemas.openxmlformats.org/drawingml/2006/main" xmlns:p="http://schemas.openxmlformats.org/presentationml/2006/main" xmlns:r="http://schemas.openxmlformats.org/officeDocument/2006/relationships">
-  <p:cSld>
-    <p:bg>
-      <p:bgPr>
-        <a:solidFill>
-          <a:srgbClr val="0B1F3A"/>
-        </a:solidFill>
-        <a:effectLst/>
-      </p:bgPr>
-    </p:bg>
-    <p:spTree>
-      <p:nvGrpSpPr>
-        <p:cNvPr id="1" name=""/>
-        <p:cNvGrpSpPr/>
-        <p:nvPr/>
-      </p:nvGrpSpPr>
-      <p:grpSpPr/>
-      <p:sp>
-        <p:nvSpPr>
-          <p:cNvPr id="2" name="TextBox 1"/>
-          <p:cNvSpPr txBox="1"/>
-          <p:nvPr/>
-        </p:nvSpPr>
-        <p:spPr>
-          <a:xfrm>
-            <a:off x="594360" y="292608"/>
-            <a:ext cx="10972800" cy="320040"/>
-          </a:xfrm>
-          <a:prstGeom prst="rect">
-            <a:avLst/>
-          </a:prstGeom>
-          <a:noFill/>
-        </p:spPr>
-        <p:txBody>
-          <a:bodyPr wrap="square" lIns="54864" rIns="54864" tIns="54864" bIns="54864" anchor="ctr">
-            <a:normAutofit/>
-          </a:bodyPr>
-          <a:lstStyle/>
-          <a:p>
-            <a:pPr algn="l"/>
-            <a:r>
-              <a:rPr sz="1100" b="1">
-                <a:solidFill>
-                  <a:srgbClr val="0078D4"/>
-                </a:solidFill>
-                <a:latin typeface="Aptos"/>
-              </a:rPr>
-              <a:t>HACKATHON OUTCOME</a:t>
-            </a:r>
-          </a:p>
-        </p:txBody>
-      </p:sp>
-      <p:sp>
-        <p:nvSpPr>
-          <p:cNvPr id="3" name="TextBox 2"/>
-          <p:cNvSpPr txBox="1"/>
-          <p:nvPr/>
-        </p:nvSpPr>
-        <p:spPr>
-          <a:xfrm>
-            <a:off x="594360" y="621792"/>
-            <a:ext cx="10972800" cy="658368"/>
-          </a:xfrm>
-          <a:prstGeom prst="rect">
-            <a:avLst/>
-          </a:prstGeom>
-          <a:noFill/>
-        </p:spPr>
-        <p:txBody>
-          <a:bodyPr wrap="square" lIns="54864" rIns="54864" tIns="54864" bIns="54864" anchor="ctr">
-            <a:normAutofit/>
-          </a:bodyPr>
-          <a:lstStyle/>
-          <a:p>
-            <a:pPr algn="l"/>
-            <a:r>
-              <a:rPr sz="2800" b="1">
-                <a:solidFill>
-                  <a:srgbClr val="FFFFFF"/>
-                </a:solidFill>
-                <a:latin typeface="Aptos"/>
-              </a:rPr>
-              <a:t>A working Azure-hosted Digital Employee prototype.</a:t>
-            </a:r>
-          </a:p>
-        </p:txBody>
-      </p:sp>
-      <p:sp>
-        <p:nvSpPr>
-          <p:cNvPr id="4" name="TextBox 3"/>
-          <p:cNvSpPr txBox="1"/>
-          <p:nvPr/>
-        </p:nvSpPr>
-        <p:spPr>
-          <a:xfrm>
-            <a:off x="612648" y="1252728"/>
-            <a:ext cx="10698480" cy="438912"/>
-          </a:xfrm>
-          <a:prstGeom prst="rect">
-            <a:avLst/>
-          </a:prstGeom>
-          <a:noFill/>
-        </p:spPr>
-        <p:txBody>
-          <a:bodyPr wrap="square" lIns="54864" rIns="54864" tIns="54864" bIns="54864" anchor="ctr">
-            <a:normAutofit/>
-          </a:bodyPr>
-          <a:lstStyle/>
-          <a:p>
-            <a:pPr algn="l"/>
-            <a:r>
-              <a:rPr sz="1400" b="0">
-                <a:solidFill>
-                  <a:srgbClr val="B9D8F4"/>
-                </a:solidFill>
-                <a:latin typeface="Aptos"/>
-              </a:rPr>
-              <a:t>The demonstration is live, evidence-grounded, and designed around transparent trust behavior.</a:t>
-            </a:r>
-          </a:p>
-        </p:txBody>
-      </p:sp>
-      <p:sp>
-        <p:nvSpPr>
-          <p:cNvPr id="5" name="Rounded Rectangle 4"/>
-          <p:cNvSpPr/>
-          <p:nvPr/>
-        </p:nvSpPr>
-        <p:spPr>
-          <a:xfrm>
-            <a:off x="658368" y="1965960"/>
-            <a:ext cx="2606040" cy="1508760"/>
-          </a:xfrm>
-          <a:prstGeom prst="roundRect">
-            <a:avLst/>
-          </a:prstGeom>
-          <a:solidFill>
-            <a:srgbClr val="142C4D"/>
-          </a:solidFill>
-          <a:ln w="15240">
-            <a:solidFill>
-              <a:srgbClr val="28547E"/>
-            </a:solidFill>
-          </a:ln>
-        </p:spPr>
-        <p:style>
-          <a:lnRef idx="1">
-            <a:schemeClr val="accent1"/>
-          </a:lnRef>
-          <a:fillRef idx="3">
-            <a:schemeClr val="accent1"/>
-          </a:fillRef>
-          <a:effectRef idx="2">
-            <a:schemeClr val="accent1"/>
-          </a:effectRef>
-          <a:fontRef idx="minor">
-            <a:schemeClr val="lt1"/>
-          </a:fontRef>
-        </p:style>
-        <p:txBody>
-          <a:bodyPr rtlCol="0" anchor="ctr"/>
-          <a:lstStyle/>
-          <a:p>
-            <a:pPr algn="ctr"/>
-          </a:p>
-        </p:txBody>
-      </p:sp>
-      <p:sp>
-        <p:nvSpPr>
-          <p:cNvPr id="6" name="TextBox 5"/>
-          <p:cNvSpPr txBox="1"/>
-          <p:nvPr/>
-        </p:nvSpPr>
-        <p:spPr>
-          <a:xfrm>
-            <a:off x="822959" y="2148840"/>
-            <a:ext cx="2240280" cy="566928"/>
-          </a:xfrm>
-          <a:prstGeom prst="rect">
-            <a:avLst/>
-          </a:prstGeom>
-          <a:noFill/>
-        </p:spPr>
-        <p:txBody>
-          <a:bodyPr wrap="square" lIns="54864" rIns="54864" tIns="54864" bIns="54864" anchor="ctr">
-            <a:normAutofit/>
-          </a:bodyPr>
-          <a:lstStyle/>
-          <a:p>
-            <a:pPr algn="ctr"/>
-            <a:r>
-              <a:rPr sz="3000" b="1">
-                <a:solidFill>
-                  <a:srgbClr val="65B5F6"/>
-                </a:solidFill>
-                <a:latin typeface="Aptos"/>
-              </a:rPr>
-              <a:t>11</a:t>
-            </a:r>
-          </a:p>
-        </p:txBody>
-      </p:sp>
-      <p:sp>
-        <p:nvSpPr>
-          <p:cNvPr id="7" name="TextBox 6"/>
-          <p:cNvSpPr txBox="1"/>
-          <p:nvPr/>
-        </p:nvSpPr>
-        <p:spPr>
-          <a:xfrm>
-            <a:off x="822959" y="2779776"/>
-            <a:ext cx="2240280" cy="310896"/>
-          </a:xfrm>
-          <a:prstGeom prst="rect">
-            <a:avLst/>
-          </a:prstGeom>
-          <a:noFill/>
-        </p:spPr>
-        <p:txBody>
-          <a:bodyPr wrap="square" lIns="54864" rIns="54864" tIns="54864" bIns="54864" anchor="ctr">
-            <a:normAutofit/>
-          </a:bodyPr>
-          <a:lstStyle/>
-          <a:p>
-            <a:pPr algn="ctr"/>
-            <a:r>
-              <a:rPr sz="1300" b="1">
-                <a:solidFill>
-                  <a:srgbClr val="FFFFFF"/>
-                </a:solidFill>
-                <a:latin typeface="Aptos"/>
-              </a:rPr>
-              <a:t>authorized AI Clones</a:t>
-            </a:r>
-          </a:p>
-        </p:txBody>
-      </p:sp>
-      <p:sp>
-        <p:nvSpPr>
-          <p:cNvPr id="8" name="Rounded Rectangle 7"/>
-          <p:cNvSpPr/>
-          <p:nvPr/>
-        </p:nvSpPr>
-        <p:spPr>
-          <a:xfrm>
-            <a:off x="3511296" y="1965960"/>
-            <a:ext cx="2606040" cy="1508760"/>
-          </a:xfrm>
-          <a:prstGeom prst="roundRect">
-            <a:avLst/>
-          </a:prstGeom>
-          <a:solidFill>
-            <a:srgbClr val="142C4D"/>
-          </a:solidFill>
-          <a:ln w="15240">
-            <a:solidFill>
-              <a:srgbClr val="28547E"/>
-            </a:solidFill>
-          </a:ln>
-        </p:spPr>
-        <p:style>
-          <a:lnRef idx="1">
-            <a:schemeClr val="accent1"/>
-          </a:lnRef>
-          <a:fillRef idx="3">
-            <a:schemeClr val="accent1"/>
-          </a:fillRef>
-          <a:effectRef idx="2">
-            <a:schemeClr val="accent1"/>
-          </a:effectRef>
-          <a:fontRef idx="minor">
-            <a:schemeClr val="lt1"/>
-          </a:fontRef>
-        </p:style>
-        <p:txBody>
-          <a:bodyPr rtlCol="0" anchor="ctr"/>
-          <a:lstStyle/>
-          <a:p>
-            <a:pPr algn="ctr"/>
-          </a:p>
-        </p:txBody>
-      </p:sp>
-      <p:sp>
-        <p:nvSpPr>
-          <p:cNvPr id="9" name="TextBox 8"/>
-          <p:cNvSpPr txBox="1"/>
-          <p:nvPr/>
-        </p:nvSpPr>
-        <p:spPr>
-          <a:xfrm>
-            <a:off x="3675887" y="2148840"/>
-            <a:ext cx="2240280" cy="566928"/>
-          </a:xfrm>
-          <a:prstGeom prst="rect">
-            <a:avLst/>
-          </a:prstGeom>
-          <a:noFill/>
-        </p:spPr>
-        <p:txBody>
-          <a:bodyPr wrap="square" lIns="54864" rIns="54864" tIns="54864" bIns="54864" anchor="ctr">
-            <a:normAutofit/>
-          </a:bodyPr>
-          <a:lstStyle/>
-          <a:p>
-            <a:pPr algn="ctr"/>
-            <a:r>
-              <a:rPr sz="3000" b="1">
-                <a:solidFill>
-                  <a:srgbClr val="65B5F6"/>
-                </a:solidFill>
-                <a:latin typeface="Aptos"/>
-              </a:rPr>
-              <a:t>7</a:t>
-            </a:r>
-          </a:p>
-        </p:txBody>
-      </p:sp>
-      <p:sp>
-        <p:nvSpPr>
-          <p:cNvPr id="10" name="TextBox 9"/>
-          <p:cNvSpPr txBox="1"/>
-          <p:nvPr/>
-        </p:nvSpPr>
-        <p:spPr>
-          <a:xfrm>
-            <a:off x="3675887" y="2779776"/>
-            <a:ext cx="2240280" cy="310896"/>
-          </a:xfrm>
-          <a:prstGeom prst="rect">
-            <a:avLst/>
-          </a:prstGeom>
-          <a:noFill/>
-        </p:spPr>
-        <p:txBody>
-          <a:bodyPr wrap="square" lIns="54864" rIns="54864" tIns="54864" bIns="54864" anchor="ctr">
-            <a:normAutofit/>
-          </a:bodyPr>
-          <a:lstStyle/>
-          <a:p>
-            <a:pPr algn="ctr"/>
-            <a:r>
-              <a:rPr sz="1300" b="1">
-                <a:solidFill>
-                  <a:srgbClr val="FFFFFF"/>
-                </a:solidFill>
-                <a:latin typeface="Aptos"/>
-              </a:rPr>
-              <a:t>mixed evidence formats</a:t>
-            </a:r>
-          </a:p>
-        </p:txBody>
-      </p:sp>
-      <p:sp>
-        <p:nvSpPr>
-          <p:cNvPr id="11" name="Rounded Rectangle 10"/>
-          <p:cNvSpPr/>
-          <p:nvPr/>
-        </p:nvSpPr>
-        <p:spPr>
-          <a:xfrm>
-            <a:off x="6364224" y="1965960"/>
-            <a:ext cx="2606040" cy="1508760"/>
-          </a:xfrm>
-          <a:prstGeom prst="roundRect">
-            <a:avLst/>
-          </a:prstGeom>
-          <a:solidFill>
-            <a:srgbClr val="142C4D"/>
-          </a:solidFill>
-          <a:ln w="15240">
-            <a:solidFill>
-              <a:srgbClr val="28547E"/>
-            </a:solidFill>
-          </a:ln>
-        </p:spPr>
-        <p:style>
-          <a:lnRef idx="1">
-            <a:schemeClr val="accent1"/>
-          </a:lnRef>
-          <a:fillRef idx="3">
-            <a:schemeClr val="accent1"/>
-          </a:fillRef>
-          <a:effectRef idx="2">
-            <a:schemeClr val="accent1"/>
-          </a:effectRef>
-          <a:fontRef idx="minor">
-            <a:schemeClr val="lt1"/>
-          </a:fontRef>
-        </p:style>
-        <p:txBody>
-          <a:bodyPr rtlCol="0" anchor="ctr"/>
-          <a:lstStyle/>
-          <a:p>
-            <a:pPr algn="ctr"/>
-          </a:p>
-        </p:txBody>
-      </p:sp>
-      <p:sp>
-        <p:nvSpPr>
-          <p:cNvPr id="12" name="TextBox 11"/>
-          <p:cNvSpPr txBox="1"/>
-          <p:nvPr/>
-        </p:nvSpPr>
-        <p:spPr>
-          <a:xfrm>
-            <a:off x="6528816" y="2148840"/>
-            <a:ext cx="2240280" cy="566928"/>
-          </a:xfrm>
-          <a:prstGeom prst="rect">
-            <a:avLst/>
-          </a:prstGeom>
-          <a:noFill/>
-        </p:spPr>
-        <p:txBody>
-          <a:bodyPr wrap="square" lIns="54864" rIns="54864" tIns="54864" bIns="54864" anchor="ctr">
-            <a:normAutofit/>
-          </a:bodyPr>
-          <a:lstStyle/>
-          <a:p>
-            <a:pPr algn="ctr"/>
-            <a:r>
-              <a:rPr sz="3000" b="1">
-                <a:solidFill>
-                  <a:srgbClr val="65B5F6"/>
-                </a:solidFill>
-                <a:latin typeface="Aptos"/>
-              </a:rPr>
-              <a:t>1</a:t>
-            </a:r>
-          </a:p>
-        </p:txBody>
-      </p:sp>
-      <p:sp>
-        <p:nvSpPr>
-          <p:cNvPr id="13" name="TextBox 12"/>
-          <p:cNvSpPr txBox="1"/>
-          <p:nvPr/>
-        </p:nvSpPr>
-        <p:spPr>
-          <a:xfrm>
-            <a:off x="6528816" y="2779776"/>
-            <a:ext cx="2240280" cy="310896"/>
-          </a:xfrm>
-          <a:prstGeom prst="rect">
-            <a:avLst/>
-          </a:prstGeom>
-          <a:noFill/>
-        </p:spPr>
-        <p:txBody>
-          <a:bodyPr wrap="square" lIns="54864" rIns="54864" tIns="54864" bIns="54864" anchor="ctr">
-            <a:normAutofit/>
-          </a:bodyPr>
-          <a:lstStyle/>
-          <a:p>
-            <a:pPr algn="ctr"/>
-            <a:r>
-              <a:rPr sz="1300" b="1">
-                <a:solidFill>
-                  <a:srgbClr val="FFFFFF"/>
-                </a:solidFill>
-                <a:latin typeface="Aptos"/>
-              </a:rPr>
-              <a:t>manager-led War Room</a:t>
-            </a:r>
-          </a:p>
-        </p:txBody>
-      </p:sp>
-      <p:sp>
-        <p:nvSpPr>
-          <p:cNvPr id="14" name="Rounded Rectangle 13"/>
-          <p:cNvSpPr/>
-          <p:nvPr/>
-        </p:nvSpPr>
-        <p:spPr>
-          <a:xfrm>
-            <a:off x="9217152" y="1965960"/>
-            <a:ext cx="2606040" cy="1508760"/>
-          </a:xfrm>
-          <a:prstGeom prst="roundRect">
-            <a:avLst/>
-          </a:prstGeom>
-          <a:solidFill>
-            <a:srgbClr val="142C4D"/>
-          </a:solidFill>
-          <a:ln w="15240">
-            <a:solidFill>
-              <a:srgbClr val="28547E"/>
-            </a:solidFill>
-          </a:ln>
-        </p:spPr>
-        <p:style>
-          <a:lnRef idx="1">
-            <a:schemeClr val="accent1"/>
-          </a:lnRef>
-          <a:fillRef idx="3">
-            <a:schemeClr val="accent1"/>
-          </a:fillRef>
-          <a:effectRef idx="2">
-            <a:schemeClr val="accent1"/>
-          </a:effectRef>
-          <a:fontRef idx="minor">
-            <a:schemeClr val="lt1"/>
-          </a:fontRef>
-        </p:style>
-        <p:txBody>
-          <a:bodyPr rtlCol="0" anchor="ctr"/>
-          <a:lstStyle/>
-          <a:p>
-            <a:pPr algn="ctr"/>
-          </a:p>
-        </p:txBody>
-      </p:sp>
-      <p:sp>
-        <p:nvSpPr>
-          <p:cNvPr id="15" name="TextBox 14"/>
-          <p:cNvSpPr txBox="1"/>
-          <p:nvPr/>
-        </p:nvSpPr>
-        <p:spPr>
-          <a:xfrm>
-            <a:off x="9381744" y="2148840"/>
-            <a:ext cx="2240280" cy="566928"/>
-          </a:xfrm>
-          <a:prstGeom prst="rect">
-            <a:avLst/>
-          </a:prstGeom>
-          <a:noFill/>
-        </p:spPr>
-        <p:txBody>
-          <a:bodyPr wrap="square" lIns="54864" rIns="54864" tIns="54864" bIns="54864" anchor="ctr">
-            <a:normAutofit/>
-          </a:bodyPr>
-          <a:lstStyle/>
-          <a:p>
-            <a:pPr algn="ctr"/>
-            <a:r>
-              <a:rPr sz="3000" b="1">
-                <a:solidFill>
-                  <a:srgbClr val="65B5F6"/>
-                </a:solidFill>
-                <a:latin typeface="Aptos"/>
-              </a:rPr>
-              <a:t>0–1</a:t>
-            </a:r>
-          </a:p>
-        </p:txBody>
-      </p:sp>
-      <p:sp>
-        <p:nvSpPr>
-          <p:cNvPr id="16" name="TextBox 15"/>
-          <p:cNvSpPr txBox="1"/>
-          <p:nvPr/>
-        </p:nvSpPr>
-        <p:spPr>
-          <a:xfrm>
-            <a:off x="9381744" y="2779776"/>
-            <a:ext cx="2240280" cy="310896"/>
-          </a:xfrm>
-          <a:prstGeom prst="rect">
-            <a:avLst/>
-          </a:prstGeom>
-          <a:noFill/>
-        </p:spPr>
-        <p:txBody>
-          <a:bodyPr wrap="square" lIns="54864" rIns="54864" tIns="54864" bIns="54864" anchor="ctr">
-            <a:normAutofit/>
-          </a:bodyPr>
-          <a:lstStyle/>
-          <a:p>
-            <a:pPr algn="ctr"/>
-            <a:r>
-              <a:rPr sz="1300" b="1">
-                <a:solidFill>
-                  <a:srgbClr val="FFFFFF"/>
-                </a:solidFill>
-                <a:latin typeface="Aptos"/>
-              </a:rPr>
-              <a:t>Container App replicas</a:t>
-            </a:r>
-          </a:p>
-        </p:txBody>
-      </p:sp>
-      <p:sp>
-        <p:nvSpPr>
-          <p:cNvPr id="17" name="TextBox 16"/>
-          <p:cNvSpPr txBox="1"/>
-          <p:nvPr/>
-        </p:nvSpPr>
-        <p:spPr>
-          <a:xfrm>
-            <a:off x="685800" y="4069080"/>
-            <a:ext cx="1097280" cy="256032"/>
-          </a:xfrm>
-          <a:prstGeom prst="rect">
-            <a:avLst/>
-          </a:prstGeom>
-          <a:noFill/>
-        </p:spPr>
-        <p:txBody>
-          <a:bodyPr wrap="square" lIns="54864" rIns="54864" tIns="54864" bIns="54864" anchor="ctr">
-            <a:normAutofit/>
-          </a:bodyPr>
-          <a:lstStyle/>
-          <a:p>
-            <a:pPr algn="l"/>
-            <a:r>
-              <a:rPr sz="1100" b="1">
-                <a:solidFill>
-                  <a:srgbClr val="65B5F6"/>
-                </a:solidFill>
-                <a:latin typeface="Aptos"/>
-              </a:rPr>
-              <a:t>DELIVERED</a:t>
-            </a:r>
-          </a:p>
-        </p:txBody>
-      </p:sp>
-      <p:sp>
-        <p:nvSpPr>
-          <p:cNvPr id="18" name="TextBox 17"/>
-          <p:cNvSpPr txBox="1"/>
-          <p:nvPr/>
-        </p:nvSpPr>
-        <p:spPr>
-          <a:xfrm>
-            <a:off x="685800" y="4407408"/>
-            <a:ext cx="7315200" cy="1600200"/>
-          </a:xfrm>
-          <a:prstGeom prst="rect">
-            <a:avLst/>
-          </a:prstGeom>
-          <a:noFill/>
-        </p:spPr>
-        <p:txBody>
-          <a:bodyPr wrap="square">
-            <a:normAutofit/>
-          </a:bodyPr>
-          <a:lstStyle/>
-          <a:p>
-            <a:pPr>
-              <a:spcAft>
-                <a:spcPts val="1000"/>
-              </a:spcAft>
-              <a:defRPr sz="1600">
-                <a:solidFill>
-                  <a:srgbClr val="FFFFFF"/>
-                </a:solidFill>
-                <a:latin typeface="Aptos"/>
-              </a:defRPr>
-            </a:pPr>
-            <a:r>
-              <a:t>•  Individual cited guidance with evidence-strength and uncertainty signals</a:t>
-            </a:r>
-          </a:p>
-          <a:p>
-            <a:pPr>
-              <a:spcAft>
-                <a:spcPts val="1000"/>
-              </a:spcAft>
-              <a:defRPr sz="1600">
-                <a:solidFill>
-                  <a:srgbClr val="FFFFFF"/>
-                </a:solidFill>
-                <a:latin typeface="Aptos"/>
-              </a:defRPr>
-            </a:pPr>
-            <a:r>
-              <a:t>•  Eleven-person War Room with challenges, dissent, risks, and owned actions</a:t>
-            </a:r>
-          </a:p>
-          <a:p>
-            <a:pPr>
-              <a:spcAft>
-                <a:spcPts val="1000"/>
-              </a:spcAft>
-              <a:defRPr sz="1600">
-                <a:solidFill>
-                  <a:srgbClr val="FFFFFF"/>
-                </a:solidFill>
-                <a:latin typeface="Aptos"/>
-              </a:defRPr>
-            </a:pPr>
-            <a:r>
-              <a:t>•  Managed-identity Azure OpenAI access—no API key in the image or infrastructure</a:t>
-            </a:r>
-          </a:p>
-          <a:p>
-            <a:pPr>
-              <a:spcAft>
-                <a:spcPts val="1000"/>
-              </a:spcAft>
-              <a:defRPr sz="1600">
-                <a:solidFill>
-                  <a:srgbClr val="FFFFFF"/>
-                </a:solidFill>
-                <a:latin typeface="Aptos"/>
-              </a:defRPr>
-            </a:pPr>
-            <a:r>
-              <a:t>•  Scale-to-zero hosting with an estimated fixed infrastructure cost of about $5/month</a:t>
-            </a:r>
-          </a:p>
-        </p:txBody>
-      </p:sp>
-      <p:sp>
-        <p:nvSpPr>
-          <p:cNvPr id="19" name="Rounded Rectangle 18"/>
-          <p:cNvSpPr/>
-          <p:nvPr/>
-        </p:nvSpPr>
-        <p:spPr>
-          <a:xfrm>
-            <a:off x="8458200" y="4069080"/>
-            <a:ext cx="3063240" cy="1627632"/>
-          </a:xfrm>
-          <a:prstGeom prst="roundRect">
-            <a:avLst/>
-          </a:prstGeom>
-          <a:solidFill>
-            <a:srgbClr val="0D3858"/>
-          </a:solidFill>
-          <a:ln w="15240">
-            <a:solidFill>
-              <a:srgbClr val="278EC8"/>
-            </a:solidFill>
-          </a:ln>
-        </p:spPr>
-        <p:style>
-          <a:lnRef idx="1">
-            <a:schemeClr val="accent1"/>
-          </a:lnRef>
-          <a:fillRef idx="3">
-            <a:schemeClr val="accent1"/>
-          </a:fillRef>
-          <a:effectRef idx="2">
-            <a:schemeClr val="accent1"/>
-          </a:effectRef>
-          <a:fontRef idx="minor">
-            <a:schemeClr val="lt1"/>
-          </a:fontRef>
-        </p:style>
-        <p:txBody>
-          <a:bodyPr rtlCol="0" anchor="ctr"/>
-          <a:lstStyle/>
-          <a:p>
-            <a:pPr algn="ctr"/>
-          </a:p>
-        </p:txBody>
-      </p:sp>
-      <p:sp>
-        <p:nvSpPr>
-          <p:cNvPr id="20" name="TextBox 19"/>
-          <p:cNvSpPr txBox="1"/>
-          <p:nvPr/>
-        </p:nvSpPr>
-        <p:spPr>
-          <a:xfrm>
-            <a:off x="8732520" y="4315968"/>
-            <a:ext cx="640080" cy="274320"/>
-          </a:xfrm>
-          <a:prstGeom prst="rect">
-            <a:avLst/>
-          </a:prstGeom>
-          <a:noFill/>
-        </p:spPr>
-        <p:txBody>
-          <a:bodyPr wrap="square" lIns="54864" rIns="54864" tIns="54864" bIns="54864" anchor="ctr">
-            <a:normAutofit/>
-          </a:bodyPr>
-          <a:lstStyle/>
-          <a:p>
-            <a:pPr algn="l"/>
-            <a:r>
-              <a:rPr sz="1100" b="1">
-                <a:solidFill>
-                  <a:srgbClr val="8DE1D6"/>
-                </a:solidFill>
-                <a:latin typeface="Aptos"/>
-              </a:rPr>
-              <a:t>LIVE</a:t>
-            </a:r>
-          </a:p>
-        </p:txBody>
-      </p:sp>
-      <p:sp>
-        <p:nvSpPr>
-          <p:cNvPr id="21" name="TextBox 20"/>
-          <p:cNvSpPr txBox="1"/>
-          <p:nvPr/>
-        </p:nvSpPr>
-        <p:spPr>
-          <a:xfrm>
-            <a:off x="8732520" y="4681728"/>
-            <a:ext cx="2468880" cy="365760"/>
-          </a:xfrm>
-          <a:prstGeom prst="rect">
-            <a:avLst/>
-          </a:prstGeom>
-          <a:noFill/>
-        </p:spPr>
-        <p:txBody>
-          <a:bodyPr wrap="square" lIns="54864" rIns="54864" tIns="54864" bIns="54864" anchor="ctr">
-            <a:normAutofit/>
-          </a:bodyPr>
-          <a:lstStyle/>
-          <a:p>
-            <a:pPr algn="l"/>
-            <a:r>
-              <a:rPr sz="1900" b="1">
-                <a:solidFill>
-                  <a:srgbClr val="FFFFFF"/>
-                </a:solidFill>
-                <a:latin typeface="Aptos"/>
-              </a:rPr>
-              <a:t>Azure Container Apps</a:t>
-            </a:r>
-          </a:p>
-        </p:txBody>
-      </p:sp>
-      <p:sp>
-        <p:nvSpPr>
-          <p:cNvPr id="22" name="TextBox 21"/>
-          <p:cNvSpPr txBox="1"/>
-          <p:nvPr/>
-        </p:nvSpPr>
-        <p:spPr>
-          <a:xfrm>
-            <a:off x="8732520" y="5074920"/>
-            <a:ext cx="2423160" cy="384048"/>
-          </a:xfrm>
-          <a:prstGeom prst="rect">
-            <a:avLst/>
-          </a:prstGeom>
-          <a:noFill/>
-        </p:spPr>
-        <p:txBody>
-          <a:bodyPr wrap="square" lIns="54864" rIns="54864" tIns="54864" bIns="54864" anchor="ctr">
-            <a:normAutofit/>
-          </a:bodyPr>
-          <a:lstStyle/>
-          <a:p>
-            <a:pPr algn="l"/>
-            <a:r>
-              <a:rPr sz="1200" b="0">
-                <a:solidFill>
-                  <a:srgbClr val="B9D8F4"/>
-                </a:solidFill>
-                <a:latin typeface="Aptos"/>
-              </a:rPr>
-              <a:t>East US · public hackathon endpoint</a:t>
-            </a:r>
-          </a:p>
-        </p:txBody>
-      </p:sp>
-      <p:sp>
-        <p:nvSpPr>
-          <p:cNvPr id="23" name="TextBox 22"/>
-          <p:cNvSpPr txBox="1"/>
-          <p:nvPr/>
-        </p:nvSpPr>
-        <p:spPr>
-          <a:xfrm>
-            <a:off x="594360" y="6519672"/>
-            <a:ext cx="4114800" cy="164592"/>
-          </a:xfrm>
-          <a:prstGeom prst="rect">
-            <a:avLst/>
-          </a:prstGeom>
-          <a:noFill/>
-        </p:spPr>
-        <p:txBody>
-          <a:bodyPr wrap="square" lIns="54864" rIns="54864" tIns="54864" bIns="54864" anchor="ctr">
-            <a:normAutofit/>
-          </a:bodyPr>
-          <a:lstStyle/>
-          <a:p>
-            <a:pPr algn="l"/>
-            <a:r>
-              <a:rPr sz="800" b="1">
-                <a:solidFill>
-                  <a:srgbClr val="5E6B82"/>
-                </a:solidFill>
-                <a:latin typeface="Aptos"/>
-              </a:rPr>
-              <a:t>EXPERTTWIN · HACKATHON DEMO</a:t>
-            </a:r>
-          </a:p>
-        </p:txBody>
-      </p:sp>
-      <p:sp>
-        <p:nvSpPr>
-          <p:cNvPr id="24" name="TextBox 23"/>
           <p:cNvSpPr txBox="1"/>
           <p:nvPr/>
         </p:nvSpPr>
